--- a/demo/Agentic-Development-Team-Demo.pptx
+++ b/demo/Agentic-Development-Team-Demo.pptx
@@ -11,9 +11,6 @@
     <p:sldId id="259" r:id="rId10"/>
     <p:sldId id="260" r:id="rId11"/>
     <p:sldId id="261" r:id="rId12"/>
-    <p:sldId id="262" r:id="rId13"/>
-    <p:sldId id="263" r:id="rId14"/>
-    <p:sldId id="264" r:id="rId15"/>
   </p:sldIdLst>
   <p:sldSz cx="12191695" cy="6858000" type="screen4x3"/>
   <p:notesSz cx="6858000" cy="9144000"/>
@@ -3092,7 +3089,7 @@
     <p:bg>
       <p:bgPr>
         <a:solidFill>
-          <a:srgbClr val="122038"/>
+          <a:srgbClr val="F9F6EF"/>
         </a:solidFill>
         <a:effectLst/>
       </p:bgPr>
@@ -3106,20 +3103,92 @@
       <p:grpSpPr/>
       <p:sp>
         <p:nvSpPr>
-          <p:cNvPr id="2" name="Rectangle 1"/>
+          <p:cNvPr id="2" name="TextBox 1"/>
+          <p:cNvSpPr txBox="1"/>
+          <p:nvPr/>
+        </p:nvSpPr>
+        <p:spPr>
+          <a:xfrm>
+            <a:off x="640080" y="411480"/>
+            <a:ext cx="10972800" cy="640080"/>
+          </a:xfrm>
+          <a:prstGeom prst="rect">
+            <a:avLst/>
+          </a:prstGeom>
+          <a:noFill/>
+        </p:spPr>
+        <p:txBody>
+          <a:bodyPr wrap="square">
+            <a:spAutoFit/>
+          </a:bodyPr>
+          <a:lstStyle/>
+          <a:p>
+            <a:pPr>
+              <a:defRPr sz="3000" b="1">
+                <a:solidFill>
+                  <a:srgbClr val="164A61"/>
+                </a:solidFill>
+                <a:latin typeface="Aptos"/>
+              </a:defRPr>
+            </a:pPr>
+            <a:r>
+              <a:t>Hotel demo: ask, track, see the result</a:t>
+            </a:r>
+          </a:p>
+        </p:txBody>
+      </p:sp>
+      <p:sp>
+        <p:nvSpPr>
+          <p:cNvPr id="3" name="TextBox 2"/>
+          <p:cNvSpPr txBox="1"/>
+          <p:nvPr/>
+        </p:nvSpPr>
+        <p:spPr>
+          <a:xfrm>
+            <a:off x="658368" y="1097280"/>
+            <a:ext cx="10789920" cy="548640"/>
+          </a:xfrm>
+          <a:prstGeom prst="rect">
+            <a:avLst/>
+          </a:prstGeom>
+          <a:noFill/>
+        </p:spPr>
+        <p:txBody>
+          <a:bodyPr wrap="square">
+            <a:spAutoFit/>
+          </a:bodyPr>
+          <a:lstStyle/>
+          <a:p>
+            <a:pPr>
+              <a:defRPr sz="1600" b="0">
+                <a:solidFill>
+                  <a:srgbClr val="04668C"/>
+                </a:solidFill>
+                <a:latin typeface="Aptos"/>
+              </a:defRPr>
+            </a:pPr>
+            <a:r>
+              <a:t>5-10 minutes | Use an existing change rather than waiting for a new build</a:t>
+            </a:r>
+          </a:p>
+        </p:txBody>
+      </p:sp>
+      <p:sp>
+        <p:nvSpPr>
+          <p:cNvPr id="4" name="Rectangle 3"/>
           <p:cNvSpPr/>
           <p:nvPr/>
         </p:nvSpPr>
         <p:spPr>
           <a:xfrm>
-            <a:off x="0" y="0"/>
-            <a:ext cx="219456" cy="6858000"/>
+            <a:off x="0" y="6629400"/>
+            <a:ext cx="12191695" cy="228600"/>
           </a:xfrm>
           <a:prstGeom prst="rect">
             <a:avLst/>
           </a:prstGeom>
           <a:solidFill>
-            <a:srgbClr val="0078D4"/>
+            <a:srgbClr val="04668C"/>
           </a:solidFill>
           <a:ln>
             <a:noFill/>
@@ -3149,86 +3218,14 @@
       </p:sp>
       <p:sp>
         <p:nvSpPr>
-          <p:cNvPr id="3" name="TextBox 2"/>
-          <p:cNvSpPr txBox="1"/>
-          <p:nvPr/>
-        </p:nvSpPr>
-        <p:spPr>
-          <a:xfrm>
-            <a:off x="822960" y="1828800"/>
-            <a:ext cx="10424160" cy="1280160"/>
-          </a:xfrm>
-          <a:prstGeom prst="rect">
-            <a:avLst/>
-          </a:prstGeom>
-          <a:noFill/>
-        </p:spPr>
-        <p:txBody>
-          <a:bodyPr wrap="none">
-            <a:spAutoFit/>
-          </a:bodyPr>
-          <a:lstStyle/>
-          <a:p>
-            <a:pPr>
-              <a:defRPr sz="3800" b="1">
-                <a:solidFill>
-                  <a:srgbClr val="FFFFFF"/>
-                </a:solidFill>
-                <a:latin typeface="Aptos Display"/>
-              </a:defRPr>
-            </a:pPr>
-            <a:r>
-              <a:t>Agentic Hotel Development</a:t>
-            </a:r>
-          </a:p>
-        </p:txBody>
-      </p:sp>
-      <p:sp>
-        <p:nvSpPr>
-          <p:cNvPr id="4" name="TextBox 3"/>
-          <p:cNvSpPr txBox="1"/>
-          <p:nvPr/>
-        </p:nvSpPr>
-        <p:spPr>
-          <a:xfrm>
-            <a:off x="859536" y="3063240"/>
-            <a:ext cx="9875520" cy="1097280"/>
-          </a:xfrm>
-          <a:prstGeom prst="rect">
-            <a:avLst/>
-          </a:prstGeom>
-          <a:noFill/>
-        </p:spPr>
-        <p:txBody>
-          <a:bodyPr wrap="none">
-            <a:spAutoFit/>
-          </a:bodyPr>
-          <a:lstStyle/>
-          <a:p>
-            <a:pPr>
-              <a:defRPr sz="2300">
-                <a:solidFill>
-                  <a:srgbClr val="BEDBF5"/>
-                </a:solidFill>
-                <a:latin typeface="Aptos"/>
-              </a:defRPr>
-            </a:pPr>
-            <a:r>
-              <a:t>Team demo: requirement to verified development deployment</a:t>
-            </a:r>
-          </a:p>
-        </p:txBody>
-      </p:sp>
-      <p:sp>
-        <p:nvSpPr>
           <p:cNvPr id="5" name="TextBox 4"/>
           <p:cNvSpPr txBox="1"/>
           <p:nvPr/>
         </p:nvSpPr>
         <p:spPr>
           <a:xfrm>
-            <a:off x="859536" y="5943600"/>
-            <a:ext cx="7315200" cy="365760"/>
+            <a:off x="658368" y="6217920"/>
+            <a:ext cx="9875520" cy="274320"/>
           </a:xfrm>
           <a:prstGeom prst="rect">
             <a:avLst/>
@@ -3236,21 +3233,475 @@
           <a:noFill/>
         </p:spPr>
         <p:txBody>
-          <a:bodyPr wrap="none">
+          <a:bodyPr wrap="square">
             <a:spAutoFit/>
           </a:bodyPr>
           <a:lstStyle/>
           <a:p>
             <a:pPr>
-              <a:defRPr sz="1600">
-                <a:solidFill>
-                  <a:srgbClr val="FFFFFF"/>
+              <a:defRPr sz="1200" b="0">
+                <a:solidFill>
+                  <a:srgbClr val="164A61"/>
                 </a:solidFill>
                 <a:latin typeface="Aptos"/>
               </a:defRPr>
             </a:pPr>
             <a:r>
-              <a:t>Hotel Web + API are the product. Agents are the delivery system.</a:t>
+              <a:t>Development demo | Production remains manual</a:t>
+            </a:r>
+          </a:p>
+        </p:txBody>
+      </p:sp>
+      <p:sp>
+        <p:nvSpPr>
+          <p:cNvPr id="6" name="TextBox 5"/>
+          <p:cNvSpPr txBox="1"/>
+          <p:nvPr/>
+        </p:nvSpPr>
+        <p:spPr>
+          <a:xfrm>
+            <a:off x="10972800" y="6217920"/>
+            <a:ext cx="502920" cy="274320"/>
+          </a:xfrm>
+          <a:prstGeom prst="rect">
+            <a:avLst/>
+          </a:prstGeom>
+          <a:noFill/>
+        </p:spPr>
+        <p:txBody>
+          <a:bodyPr wrap="square">
+            <a:spAutoFit/>
+          </a:bodyPr>
+          <a:lstStyle/>
+          <a:p>
+            <a:pPr algn="r">
+              <a:defRPr sz="1200" b="0">
+                <a:solidFill>
+                  <a:srgbClr val="164A61"/>
+                </a:solidFill>
+                <a:latin typeface="Aptos"/>
+              </a:defRPr>
+            </a:pPr>
+            <a:r>
+              <a:t>1</a:t>
+            </a:r>
+          </a:p>
+        </p:txBody>
+      </p:sp>
+      <p:sp>
+        <p:nvSpPr>
+          <p:cNvPr id="7" name="TextBox 6"/>
+          <p:cNvSpPr txBox="1"/>
+          <p:nvPr/>
+        </p:nvSpPr>
+        <p:spPr>
+          <a:xfrm>
+            <a:off x="777240" y="1828800"/>
+            <a:ext cx="10607040" cy="731520"/>
+          </a:xfrm>
+          <a:prstGeom prst="rect">
+            <a:avLst/>
+          </a:prstGeom>
+          <a:noFill/>
+        </p:spPr>
+        <p:txBody>
+          <a:bodyPr wrap="square">
+            <a:spAutoFit/>
+          </a:bodyPr>
+          <a:lstStyle/>
+          <a:p>
+            <a:pPr>
+              <a:defRPr sz="2400" b="0">
+                <a:solidFill>
+                  <a:srgbClr val="164A61"/>
+                </a:solidFill>
+                <a:latin typeface="Aptos"/>
+              </a:defRPr>
+            </a:pPr>
+            <a:r>
+              <a:t>Describe a guest need. Follow the work. See the development result.</a:t>
+            </a:r>
+          </a:p>
+        </p:txBody>
+      </p:sp>
+      <p:sp>
+        <p:nvSpPr>
+          <p:cNvPr id="8" name="Rounded Rectangle 7"/>
+          <p:cNvSpPr/>
+          <p:nvPr/>
+        </p:nvSpPr>
+        <p:spPr>
+          <a:xfrm>
+            <a:off x="777240" y="2834640"/>
+            <a:ext cx="1975103" cy="914400"/>
+          </a:xfrm>
+          <a:prstGeom prst="roundRect">
+            <a:avLst/>
+          </a:prstGeom>
+          <a:solidFill>
+            <a:srgbClr val="164A61"/>
+          </a:solidFill>
+          <a:ln>
+            <a:noFill/>
+          </a:ln>
+        </p:spPr>
+        <p:style>
+          <a:lnRef idx="1">
+            <a:schemeClr val="accent1"/>
+          </a:lnRef>
+          <a:fillRef idx="3">
+            <a:schemeClr val="accent1"/>
+          </a:fillRef>
+          <a:effectRef idx="2">
+            <a:schemeClr val="accent1"/>
+          </a:effectRef>
+          <a:fontRef idx="minor">
+            <a:schemeClr val="lt1"/>
+          </a:fontRef>
+        </p:style>
+        <p:txBody>
+          <a:bodyPr rtlCol="0" anchor="ctr"/>
+          <a:lstStyle/>
+          <a:p>
+            <a:pPr algn="ctr">
+              <a:defRPr sz="1800" b="1">
+                <a:solidFill>
+                  <a:srgbClr val="F9F6EF"/>
+                </a:solidFill>
+                <a:latin typeface="Aptos"/>
+              </a:defRPr>
+            </a:pPr>
+            <a:r>
+              <a:t>Ask</a:t>
+            </a:r>
+          </a:p>
+        </p:txBody>
+      </p:sp>
+      <p:sp>
+        <p:nvSpPr>
+          <p:cNvPr id="9" name="Rounded Rectangle 8"/>
+          <p:cNvSpPr/>
+          <p:nvPr/>
+        </p:nvSpPr>
+        <p:spPr>
+          <a:xfrm>
+            <a:off x="2935224" y="2834640"/>
+            <a:ext cx="1975103" cy="914400"/>
+          </a:xfrm>
+          <a:prstGeom prst="roundRect">
+            <a:avLst/>
+          </a:prstGeom>
+          <a:solidFill>
+            <a:srgbClr val="04668C"/>
+          </a:solidFill>
+          <a:ln>
+            <a:noFill/>
+          </a:ln>
+        </p:spPr>
+        <p:style>
+          <a:lnRef idx="1">
+            <a:schemeClr val="accent1"/>
+          </a:lnRef>
+          <a:fillRef idx="3">
+            <a:schemeClr val="accent1"/>
+          </a:fillRef>
+          <a:effectRef idx="2">
+            <a:schemeClr val="accent1"/>
+          </a:effectRef>
+          <a:fontRef idx="minor">
+            <a:schemeClr val="lt1"/>
+          </a:fontRef>
+        </p:style>
+        <p:txBody>
+          <a:bodyPr rtlCol="0" anchor="ctr"/>
+          <a:lstStyle/>
+          <a:p>
+            <a:pPr algn="ctr">
+              <a:defRPr sz="1800" b="1">
+                <a:solidFill>
+                  <a:srgbClr val="F9F6EF"/>
+                </a:solidFill>
+                <a:latin typeface="Aptos"/>
+              </a:defRPr>
+            </a:pPr>
+            <a:r>
+              <a:t>Boards</a:t>
+            </a:r>
+          </a:p>
+        </p:txBody>
+      </p:sp>
+      <p:sp>
+        <p:nvSpPr>
+          <p:cNvPr id="10" name="Rounded Rectangle 9"/>
+          <p:cNvSpPr/>
+          <p:nvPr/>
+        </p:nvSpPr>
+        <p:spPr>
+          <a:xfrm>
+            <a:off x="5093207" y="2834640"/>
+            <a:ext cx="1975103" cy="914400"/>
+          </a:xfrm>
+          <a:prstGeom prst="roundRect">
+            <a:avLst/>
+          </a:prstGeom>
+          <a:solidFill>
+            <a:srgbClr val="164A61"/>
+          </a:solidFill>
+          <a:ln>
+            <a:noFill/>
+          </a:ln>
+        </p:spPr>
+        <p:style>
+          <a:lnRef idx="1">
+            <a:schemeClr val="accent1"/>
+          </a:lnRef>
+          <a:fillRef idx="3">
+            <a:schemeClr val="accent1"/>
+          </a:fillRef>
+          <a:effectRef idx="2">
+            <a:schemeClr val="accent1"/>
+          </a:effectRef>
+          <a:fontRef idx="minor">
+            <a:schemeClr val="lt1"/>
+          </a:fontRef>
+        </p:style>
+        <p:txBody>
+          <a:bodyPr rtlCol="0" anchor="ctr"/>
+          <a:lstStyle/>
+          <a:p>
+            <a:pPr algn="ctr">
+              <a:defRPr sz="1800" b="1">
+                <a:solidFill>
+                  <a:srgbClr val="F9F6EF"/>
+                </a:solidFill>
+                <a:latin typeface="Aptos"/>
+              </a:defRPr>
+            </a:pPr>
+            <a:r>
+              <a:t>Cloud agent</a:t>
+            </a:r>
+          </a:p>
+        </p:txBody>
+      </p:sp>
+      <p:sp>
+        <p:nvSpPr>
+          <p:cNvPr id="11" name="Rounded Rectangle 10"/>
+          <p:cNvSpPr/>
+          <p:nvPr/>
+        </p:nvSpPr>
+        <p:spPr>
+          <a:xfrm>
+            <a:off x="7251192" y="2834640"/>
+            <a:ext cx="1975103" cy="914400"/>
+          </a:xfrm>
+          <a:prstGeom prst="roundRect">
+            <a:avLst/>
+          </a:prstGeom>
+          <a:solidFill>
+            <a:srgbClr val="04668C"/>
+          </a:solidFill>
+          <a:ln>
+            <a:noFill/>
+          </a:ln>
+        </p:spPr>
+        <p:style>
+          <a:lnRef idx="1">
+            <a:schemeClr val="accent1"/>
+          </a:lnRef>
+          <a:fillRef idx="3">
+            <a:schemeClr val="accent1"/>
+          </a:fillRef>
+          <a:effectRef idx="2">
+            <a:schemeClr val="accent1"/>
+          </a:effectRef>
+          <a:fontRef idx="minor">
+            <a:schemeClr val="lt1"/>
+          </a:fontRef>
+        </p:style>
+        <p:txBody>
+          <a:bodyPr rtlCol="0" anchor="ctr"/>
+          <a:lstStyle/>
+          <a:p>
+            <a:pPr algn="ctr">
+              <a:defRPr sz="1800" b="1">
+                <a:solidFill>
+                  <a:srgbClr val="F9F6EF"/>
+                </a:solidFill>
+                <a:latin typeface="Aptos"/>
+              </a:defRPr>
+            </a:pPr>
+            <a:r>
+              <a:t>Checks</a:t>
+            </a:r>
+          </a:p>
+        </p:txBody>
+      </p:sp>
+      <p:sp>
+        <p:nvSpPr>
+          <p:cNvPr id="12" name="Rounded Rectangle 11"/>
+          <p:cNvSpPr/>
+          <p:nvPr/>
+        </p:nvSpPr>
+        <p:spPr>
+          <a:xfrm>
+            <a:off x="9409176" y="2834640"/>
+            <a:ext cx="1975103" cy="914400"/>
+          </a:xfrm>
+          <a:prstGeom prst="roundRect">
+            <a:avLst/>
+          </a:prstGeom>
+          <a:solidFill>
+            <a:srgbClr val="164A61"/>
+          </a:solidFill>
+          <a:ln>
+            <a:noFill/>
+          </a:ln>
+        </p:spPr>
+        <p:style>
+          <a:lnRef idx="1">
+            <a:schemeClr val="accent1"/>
+          </a:lnRef>
+          <a:fillRef idx="3">
+            <a:schemeClr val="accent1"/>
+          </a:fillRef>
+          <a:effectRef idx="2">
+            <a:schemeClr val="accent1"/>
+          </a:effectRef>
+          <a:fontRef idx="minor">
+            <a:schemeClr val="lt1"/>
+          </a:fontRef>
+        </p:style>
+        <p:txBody>
+          <a:bodyPr rtlCol="0" anchor="ctr"/>
+          <a:lstStyle/>
+          <a:p>
+            <a:pPr algn="ctr">
+              <a:defRPr sz="1800" b="1">
+                <a:solidFill>
+                  <a:srgbClr val="F9F6EF"/>
+                </a:solidFill>
+                <a:latin typeface="Aptos"/>
+              </a:defRPr>
+            </a:pPr>
+            <a:r>
+              <a:t>Development</a:t>
+            </a:r>
+          </a:p>
+        </p:txBody>
+      </p:sp>
+      <p:sp>
+        <p:nvSpPr>
+          <p:cNvPr id="13" name="Rounded Rectangle 12"/>
+          <p:cNvSpPr/>
+          <p:nvPr/>
+        </p:nvSpPr>
+        <p:spPr>
+          <a:xfrm>
+            <a:off x="777240" y="4480560"/>
+            <a:ext cx="10607040" cy="1325880"/>
+          </a:xfrm>
+          <a:prstGeom prst="roundRect">
+            <a:avLst/>
+          </a:prstGeom>
+          <a:solidFill>
+            <a:srgbClr val="8DC4E6"/>
+          </a:solidFill>
+          <a:ln>
+            <a:solidFill>
+              <a:srgbClr val="D4CDBF"/>
+            </a:solidFill>
+          </a:ln>
+        </p:spPr>
+        <p:style>
+          <a:lnRef idx="1">
+            <a:schemeClr val="accent1"/>
+          </a:lnRef>
+          <a:fillRef idx="3">
+            <a:schemeClr val="accent1"/>
+          </a:fillRef>
+          <a:effectRef idx="2">
+            <a:schemeClr val="accent1"/>
+          </a:effectRef>
+          <a:fontRef idx="minor">
+            <a:schemeClr val="lt1"/>
+          </a:fontRef>
+        </p:style>
+        <p:txBody>
+          <a:bodyPr rtlCol="0" anchor="ctr"/>
+          <a:lstStyle/>
+          <a:p>
+            <a:pPr algn="ctr"/>
+          </a:p>
+        </p:txBody>
+      </p:sp>
+      <p:sp>
+        <p:nvSpPr>
+          <p:cNvPr id="14" name="TextBox 13"/>
+          <p:cNvSpPr txBox="1"/>
+          <p:nvPr/>
+        </p:nvSpPr>
+        <p:spPr>
+          <a:xfrm>
+            <a:off x="1005840" y="4590288"/>
+            <a:ext cx="10149840" cy="320040"/>
+          </a:xfrm>
+          <a:prstGeom prst="rect">
+            <a:avLst/>
+          </a:prstGeom>
+          <a:noFill/>
+        </p:spPr>
+        <p:txBody>
+          <a:bodyPr wrap="square">
+            <a:spAutoFit/>
+          </a:bodyPr>
+          <a:lstStyle/>
+          <a:p>
+            <a:pPr>
+              <a:defRPr sz="1700" b="1">
+                <a:solidFill>
+                  <a:srgbClr val="164A61"/>
+                </a:solidFill>
+                <a:latin typeface="Aptos"/>
+              </a:defRPr>
+            </a:pPr>
+            <a:r>
+              <a:t>One simple story</a:t>
+            </a:r>
+          </a:p>
+        </p:txBody>
+      </p:sp>
+      <p:sp>
+        <p:nvSpPr>
+          <p:cNvPr id="15" name="TextBox 14"/>
+          <p:cNvSpPr txBox="1"/>
+          <p:nvPr/>
+        </p:nvSpPr>
+        <p:spPr>
+          <a:xfrm>
+            <a:off x="1005840" y="4983480"/>
+            <a:ext cx="10149840" cy="685800"/>
+          </a:xfrm>
+          <a:prstGeom prst="rect">
+            <a:avLst/>
+          </a:prstGeom>
+          <a:noFill/>
+        </p:spPr>
+        <p:txBody>
+          <a:bodyPr wrap="square">
+            <a:spAutoFit/>
+          </a:bodyPr>
+          <a:lstStyle/>
+          <a:p>
+            <a:pPr>
+              <a:defRPr sz="1800" b="0">
+                <a:solidFill>
+                  <a:srgbClr val="164A61"/>
+                </a:solidFill>
+                <a:latin typeface="Aptos"/>
+              </a:defRPr>
+            </a:pPr>
+            <a:r>
+              <a:t>Azure Boards shows the requirement. GitHub shows the work. The Hotel shows the result.</a:t>
             </a:r>
           </a:p>
         </p:txBody>
@@ -3269,7 +3720,7 @@
     <p:bg>
       <p:bgPr>
         <a:solidFill>
-          <a:srgbClr val="FFFFFF"/>
+          <a:srgbClr val="F9F6EF"/>
         </a:solidFill>
         <a:effectLst/>
       </p:bgPr>
@@ -3289,7 +3740,7 @@
         </p:nvSpPr>
         <p:spPr>
           <a:xfrm>
-            <a:off x="594360" y="320040"/>
+            <a:off x="640080" y="411480"/>
             <a:ext cx="10972800" cy="640080"/>
           </a:xfrm>
           <a:prstGeom prst="rect">
@@ -3298,7 +3749,7 @@
           <a:noFill/>
         </p:spPr>
         <p:txBody>
-          <a:bodyPr wrap="none">
+          <a:bodyPr wrap="square">
             <a:spAutoFit/>
           </a:bodyPr>
           <a:lstStyle/>
@@ -3306,13 +3757,13 @@
             <a:pPr>
               <a:defRPr sz="3000" b="1">
                 <a:solidFill>
-                  <a:srgbClr val="122038"/>
-                </a:solidFill>
-                <a:latin typeface="Aptos Display"/>
+                  <a:srgbClr val="164A61"/>
+                </a:solidFill>
+                <a:latin typeface="Aptos"/>
               </a:defRPr>
             </a:pPr>
             <a:r>
-              <a:t>What we are demonstrating</a:t>
+              <a:t>1. Show the Hotel</a:t>
             </a:r>
           </a:p>
         </p:txBody>
@@ -3325,8 +3776,8 @@
         </p:nvSpPr>
         <p:spPr>
           <a:xfrm>
-            <a:off x="621792" y="932688"/>
-            <a:ext cx="10789920" cy="411480"/>
+            <a:off x="658368" y="1097280"/>
+            <a:ext cx="10789920" cy="548640"/>
           </a:xfrm>
           <a:prstGeom prst="rect">
             <a:avLst/>
@@ -3334,21 +3785,21 @@
           <a:noFill/>
         </p:spPr>
         <p:txBody>
-          <a:bodyPr wrap="none">
+          <a:bodyPr wrap="square">
             <a:spAutoFit/>
           </a:bodyPr>
           <a:lstStyle/>
           <a:p>
             <a:pPr>
-              <a:defRPr sz="1400">
-                <a:solidFill>
-                  <a:srgbClr val="5A6777"/>
+              <a:defRPr sz="1600" b="0">
+                <a:solidFill>
+                  <a:srgbClr val="04668C"/>
                 </a:solidFill>
                 <a:latin typeface="Aptos"/>
               </a:defRPr>
             </a:pPr>
             <a:r>
-              <a:t>A controlled, traceable software-delivery cycle</a:t>
+              <a:t>The guest experience comes first</a:t>
             </a:r>
           </a:p>
         </p:txBody>
@@ -3361,14 +3812,14 @@
         </p:nvSpPr>
         <p:spPr>
           <a:xfrm>
-            <a:off x="0" y="6656832"/>
-            <a:ext cx="12191695" cy="201168"/>
+            <a:off x="0" y="6629400"/>
+            <a:ext cx="12191695" cy="228600"/>
           </a:xfrm>
           <a:prstGeom prst="rect">
             <a:avLst/>
           </a:prstGeom>
           <a:solidFill>
-            <a:srgbClr val="0078D4"/>
+            <a:srgbClr val="04668C"/>
           </a:solidFill>
           <a:ln>
             <a:noFill/>
@@ -3404,8 +3855,8 @@
         </p:nvSpPr>
         <p:spPr>
           <a:xfrm>
-            <a:off x="11521440" y="6419088"/>
-            <a:ext cx="365760" cy="228600"/>
+            <a:off x="658368" y="6217920"/>
+            <a:ext cx="9875520" cy="274320"/>
           </a:xfrm>
           <a:prstGeom prst="rect">
             <a:avLst/>
@@ -3413,16 +3864,53 @@
           <a:noFill/>
         </p:spPr>
         <p:txBody>
-          <a:bodyPr wrap="none">
+          <a:bodyPr wrap="square">
             <a:spAutoFit/>
           </a:bodyPr>
           <a:lstStyle/>
           <a:p>
+            <a:pPr>
+              <a:defRPr sz="1200" b="0">
+                <a:solidFill>
+                  <a:srgbClr val="164A61"/>
+                </a:solidFill>
+                <a:latin typeface="Aptos"/>
+              </a:defRPr>
+            </a:pPr>
+            <a:r>
+              <a:t>Development demo | Production remains manual</a:t>
+            </a:r>
+          </a:p>
+        </p:txBody>
+      </p:sp>
+      <p:sp>
+        <p:nvSpPr>
+          <p:cNvPr id="6" name="TextBox 5"/>
+          <p:cNvSpPr txBox="1"/>
+          <p:nvPr/>
+        </p:nvSpPr>
+        <p:spPr>
+          <a:xfrm>
+            <a:off x="10972800" y="6217920"/>
+            <a:ext cx="502920" cy="274320"/>
+          </a:xfrm>
+          <a:prstGeom prst="rect">
+            <a:avLst/>
+          </a:prstGeom>
+          <a:noFill/>
+        </p:spPr>
+        <p:txBody>
+          <a:bodyPr wrap="square">
+            <a:spAutoFit/>
+          </a:bodyPr>
+          <a:lstStyle/>
+          <a:p>
             <a:pPr algn="r">
-              <a:defRPr sz="1000">
-                <a:solidFill>
-                  <a:srgbClr val="5A6777"/>
-                </a:solidFill>
+              <a:defRPr sz="1200" b="0">
+                <a:solidFill>
+                  <a:srgbClr val="164A61"/>
+                </a:solidFill>
+                <a:latin typeface="Aptos"/>
               </a:defRPr>
             </a:pPr>
             <a:r>
@@ -3433,24 +3921,95 @@
       </p:sp>
       <p:sp>
         <p:nvSpPr>
-          <p:cNvPr id="6" name="Rounded Rectangle 5"/>
+          <p:cNvPr id="7" name="TextBox 6"/>
+          <p:cNvSpPr txBox="1"/>
+          <p:nvPr/>
+        </p:nvSpPr>
+        <p:spPr>
+          <a:xfrm>
+            <a:off x="777240" y="1828800"/>
+            <a:ext cx="10607040" cy="2560320"/>
+          </a:xfrm>
+          <a:prstGeom prst="rect">
+            <a:avLst/>
+          </a:prstGeom>
+          <a:noFill/>
+        </p:spPr>
+        <p:txBody>
+          <a:bodyPr wrap="square">
+            <a:spAutoFit/>
+          </a:bodyPr>
+          <a:lstStyle/>
+          <a:p>
+            <a:pPr>
+              <a:spcAft>
+                <a:spcPts val="1200"/>
+              </a:spcAft>
+              <a:defRPr sz="2000">
+                <a:solidFill>
+                  <a:srgbClr val="164A61"/>
+                </a:solidFill>
+                <a:latin typeface="Aptos"/>
+              </a:defRPr>
+            </a:pPr>
+            <a:r>
+              <a:t>•  Open the development site and choose a hotel.</a:t>
+            </a:r>
+          </a:p>
+          <a:p>
+            <a:pPr>
+              <a:spcAft>
+                <a:spcPts val="1200"/>
+              </a:spcAft>
+              <a:defRPr sz="2000">
+                <a:solidFill>
+                  <a:srgbClr val="164A61"/>
+                </a:solidFill>
+                <a:latin typeface="Aptos"/>
+              </a:defRPr>
+            </a:pPr>
+            <a:r>
+              <a:t>•  Select future dates and guests, check availability, and show the total.</a:t>
+            </a:r>
+          </a:p>
+          <a:p>
+            <a:pPr>
+              <a:spcAft>
+                <a:spcPts val="1200"/>
+              </a:spcAft>
+              <a:defRPr sz="2000">
+                <a:solidFill>
+                  <a:srgbClr val="164A61"/>
+                </a:solidFill>
+                <a:latin typeface="Aptos"/>
+              </a:defRPr>
+            </a:pPr>
+            <a:r>
+              <a:t>•  Stop before Confirm booking: shared data does not need another reservation.</a:t>
+            </a:r>
+          </a:p>
+        </p:txBody>
+      </p:sp>
+      <p:sp>
+        <p:nvSpPr>
+          <p:cNvPr id="8" name="Rounded Rectangle 7"/>
           <p:cNvSpPr/>
           <p:nvPr/>
         </p:nvSpPr>
         <p:spPr>
           <a:xfrm>
-            <a:off x="685800" y="1508760"/>
-            <a:ext cx="3474720" cy="3566160"/>
+            <a:off x="777240" y="4480560"/>
+            <a:ext cx="10607040" cy="1325880"/>
           </a:xfrm>
           <a:prstGeom prst="roundRect">
             <a:avLst/>
           </a:prstGeom>
           <a:solidFill>
-            <a:srgbClr val="F3F7FB"/>
+            <a:srgbClr val="8DC4E6"/>
           </a:solidFill>
-          <a:ln w="25400">
+          <a:ln>
             <a:solidFill>
-              <a:srgbClr val="0078D4"/>
+              <a:srgbClr val="D4CDBF"/>
             </a:solidFill>
           </a:ln>
         </p:spPr>
@@ -3478,14 +4037,14 @@
       </p:sp>
       <p:sp>
         <p:nvSpPr>
-          <p:cNvPr id="7" name="TextBox 6"/>
+          <p:cNvPr id="9" name="TextBox 8"/>
           <p:cNvSpPr txBox="1"/>
           <p:nvPr/>
         </p:nvSpPr>
         <p:spPr>
           <a:xfrm>
-            <a:off x="914400" y="1691639"/>
-            <a:ext cx="3017520" cy="411480"/>
+            <a:off x="1005840" y="4590288"/>
+            <a:ext cx="10149840" cy="320040"/>
           </a:xfrm>
           <a:prstGeom prst="rect">
             <a:avLst/>
@@ -3493,35 +4052,35 @@
           <a:noFill/>
         </p:spPr>
         <p:txBody>
-          <a:bodyPr wrap="none">
+          <a:bodyPr wrap="square">
             <a:spAutoFit/>
           </a:bodyPr>
           <a:lstStyle/>
           <a:p>
             <a:pPr>
-              <a:defRPr sz="1800" b="1">
-                <a:solidFill>
-                  <a:srgbClr val="0078D4"/>
-                </a:solidFill>
-                <a:latin typeface="Aptos Display"/>
+              <a:defRPr sz="1700" b="1">
+                <a:solidFill>
+                  <a:srgbClr val="164A61"/>
+                </a:solidFill>
+                <a:latin typeface="Aptos"/>
               </a:defRPr>
             </a:pPr>
             <a:r>
-              <a:t>Product</a:t>
-            </a:r>
-          </a:p>
-        </p:txBody>
-      </p:sp>
-      <p:sp>
-        <p:nvSpPr>
-          <p:cNvPr id="8" name="TextBox 7"/>
+              <a:t>If the site is unavailable</a:t>
+            </a:r>
+          </a:p>
+        </p:txBody>
+      </p:sp>
+      <p:sp>
+        <p:nvSpPr>
+          <p:cNvPr id="10" name="TextBox 9"/>
           <p:cNvSpPr txBox="1"/>
           <p:nvPr/>
         </p:nvSpPr>
         <p:spPr>
           <a:xfrm>
-            <a:off x="914400" y="2167128"/>
-            <a:ext cx="3017520" cy="2743200"/>
+            <a:off x="1005840" y="4983480"/>
+            <a:ext cx="10149840" cy="685800"/>
           </a:xfrm>
           <a:prstGeom prst="rect">
             <a:avLst/>
@@ -3529,61 +4088,142 @@
           <a:noFill/>
         </p:spPr>
         <p:txBody>
-          <a:bodyPr wrap="none">
+          <a:bodyPr wrap="square">
             <a:spAutoFit/>
           </a:bodyPr>
           <a:lstStyle/>
           <a:p>
             <a:pPr>
-              <a:spcAft>
-                <a:spcPts val="400"/>
-              </a:spcAft>
-              <a:defRPr sz="1500">
-                <a:solidFill>
-                  <a:srgbClr val="122038"/>
+              <a:defRPr sz="1800" b="0">
+                <a:solidFill>
+                  <a:srgbClr val="164A61"/>
                 </a:solidFill>
                 <a:latin typeface="Aptos"/>
               </a:defRPr>
             </a:pPr>
             <a:r>
-              <a:t>Hotel Web UI</a:t>
-            </a:r>
-            <a:br/>
-            <a:r>
-              <a:t>.NET booking API</a:t>
-            </a:r>
-            <a:br/>
-            <a:r>
-              <a:t>Azure SQL persistence</a:t>
-            </a:r>
-            <a:br/>
-            <a:r>
-              <a:t>User-visible booking behavior</a:t>
-            </a:r>
-          </a:p>
-        </p:txBody>
-      </p:sp>
-      <p:sp>
-        <p:nvSpPr>
-          <p:cNvPr id="9" name="Rounded Rectangle 8"/>
+              <a:t>Show existing cloud screenshots as recorded evidence.</a:t>
+            </a:r>
+          </a:p>
+        </p:txBody>
+      </p:sp>
+    </p:spTree>
+  </p:cSld>
+  <p:clrMapOvr>
+    <a:masterClrMapping/>
+  </p:clrMapOvr>
+</p:sld>
+</file>
+
+<file path=ppt/slides/slide3.xml><?xml version="1.0" encoding="utf-8"?>
+<p:sld xmlns:a="http://schemas.openxmlformats.org/drawingml/2006/main" xmlns:p="http://schemas.openxmlformats.org/presentationml/2006/main" xmlns:r="http://schemas.openxmlformats.org/officeDocument/2006/relationships">
+  <p:cSld>
+    <p:bg>
+      <p:bgPr>
+        <a:solidFill>
+          <a:srgbClr val="F9F6EF"/>
+        </a:solidFill>
+        <a:effectLst/>
+      </p:bgPr>
+    </p:bg>
+    <p:spTree>
+      <p:nvGrpSpPr>
+        <p:cNvPr id="1" name=""/>
+        <p:cNvGrpSpPr/>
+        <p:nvPr/>
+      </p:nvGrpSpPr>
+      <p:grpSpPr/>
+      <p:sp>
+        <p:nvSpPr>
+          <p:cNvPr id="2" name="TextBox 1"/>
+          <p:cNvSpPr txBox="1"/>
+          <p:nvPr/>
+        </p:nvSpPr>
+        <p:spPr>
+          <a:xfrm>
+            <a:off x="640080" y="411480"/>
+            <a:ext cx="10972800" cy="640080"/>
+          </a:xfrm>
+          <a:prstGeom prst="rect">
+            <a:avLst/>
+          </a:prstGeom>
+          <a:noFill/>
+        </p:spPr>
+        <p:txBody>
+          <a:bodyPr wrap="square">
+            <a:spAutoFit/>
+          </a:bodyPr>
+          <a:lstStyle/>
+          <a:p>
+            <a:pPr>
+              <a:defRPr sz="3000" b="1">
+                <a:solidFill>
+                  <a:srgbClr val="164A61"/>
+                </a:solidFill>
+                <a:latin typeface="Aptos"/>
+              </a:defRPr>
+            </a:pPr>
+            <a:r>
+              <a:t>2. Ask a knowledge question</a:t>
+            </a:r>
+          </a:p>
+        </p:txBody>
+      </p:sp>
+      <p:sp>
+        <p:nvSpPr>
+          <p:cNvPr id="3" name="TextBox 2"/>
+          <p:cNvSpPr txBox="1"/>
+          <p:nvPr/>
+        </p:nvSpPr>
+        <p:spPr>
+          <a:xfrm>
+            <a:off x="658368" y="1097280"/>
+            <a:ext cx="10789920" cy="548640"/>
+          </a:xfrm>
+          <a:prstGeom prst="rect">
+            <a:avLst/>
+          </a:prstGeom>
+          <a:noFill/>
+        </p:spPr>
+        <p:txBody>
+          <a:bodyPr wrap="square">
+            <a:spAutoFit/>
+          </a:bodyPr>
+          <a:lstStyle/>
+          <a:p>
+            <a:pPr>
+              <a:defRPr sz="1600" b="0">
+                <a:solidFill>
+                  <a:srgbClr val="04668C"/>
+                </a:solidFill>
+                <a:latin typeface="Aptos"/>
+              </a:defRPr>
+            </a:pPr>
+            <a:r>
+              <a:t>Show a cited answer, not just a confident answer</a:t>
+            </a:r>
+          </a:p>
+        </p:txBody>
+      </p:sp>
+      <p:sp>
+        <p:nvSpPr>
+          <p:cNvPr id="4" name="Rectangle 3"/>
           <p:cNvSpPr/>
           <p:nvPr/>
         </p:nvSpPr>
         <p:spPr>
           <a:xfrm>
-            <a:off x="4370832" y="1508760"/>
-            <a:ext cx="3474720" cy="3566160"/>
-          </a:xfrm>
-          <a:prstGeom prst="roundRect">
+            <a:off x="0" y="6629400"/>
+            <a:ext cx="12191695" cy="228600"/>
+          </a:xfrm>
+          <a:prstGeom prst="rect">
             <a:avLst/>
           </a:prstGeom>
           <a:solidFill>
-            <a:srgbClr val="F3F7FB"/>
+            <a:srgbClr val="04668C"/>
           </a:solidFill>
-          <a:ln w="25400">
-            <a:solidFill>
-              <a:srgbClr val="009999"/>
-            </a:solidFill>
+          <a:ln>
+            <a:noFill/>
           </a:ln>
         </p:spPr>
         <p:style>
@@ -3610,14 +4250,14 @@
       </p:sp>
       <p:sp>
         <p:nvSpPr>
-          <p:cNvPr id="10" name="TextBox 9"/>
+          <p:cNvPr id="5" name="TextBox 4"/>
           <p:cNvSpPr txBox="1"/>
           <p:nvPr/>
         </p:nvSpPr>
         <p:spPr>
           <a:xfrm>
-            <a:off x="4599432" y="1691639"/>
-            <a:ext cx="3017520" cy="411480"/>
+            <a:off x="658368" y="6217920"/>
+            <a:ext cx="9875520" cy="274320"/>
           </a:xfrm>
           <a:prstGeom prst="rect">
             <a:avLst/>
@@ -3625,35 +4265,35 @@
           <a:noFill/>
         </p:spPr>
         <p:txBody>
-          <a:bodyPr wrap="none">
+          <a:bodyPr wrap="square">
             <a:spAutoFit/>
           </a:bodyPr>
           <a:lstStyle/>
           <a:p>
             <a:pPr>
-              <a:defRPr sz="1800" b="1">
-                <a:solidFill>
-                  <a:srgbClr val="009999"/>
-                </a:solidFill>
-                <a:latin typeface="Aptos Display"/>
+              <a:defRPr sz="1200" b="0">
+                <a:solidFill>
+                  <a:srgbClr val="164A61"/>
+                </a:solidFill>
+                <a:latin typeface="Aptos"/>
               </a:defRPr>
             </a:pPr>
             <a:r>
-              <a:t>Delivery system</a:t>
-            </a:r>
-          </a:p>
-        </p:txBody>
-      </p:sp>
-      <p:sp>
-        <p:nvSpPr>
-          <p:cNvPr id="11" name="TextBox 10"/>
+              <a:t>Development demo | Production remains manual</a:t>
+            </a:r>
+          </a:p>
+        </p:txBody>
+      </p:sp>
+      <p:sp>
+        <p:nvSpPr>
+          <p:cNvPr id="6" name="TextBox 5"/>
           <p:cNvSpPr txBox="1"/>
           <p:nvPr/>
         </p:nvSpPr>
         <p:spPr>
           <a:xfrm>
-            <a:off x="4599432" y="2167128"/>
-            <a:ext cx="3017520" cy="2743200"/>
+            <a:off x="10972800" y="6217920"/>
+            <a:ext cx="502920" cy="274320"/>
           </a:xfrm>
           <a:prstGeom prst="rect">
             <a:avLst/>
@@ -3661,60 +4301,116 @@
           <a:noFill/>
         </p:spPr>
         <p:txBody>
-          <a:bodyPr wrap="none">
+          <a:bodyPr wrap="square">
             <a:spAutoFit/>
           </a:bodyPr>
           <a:lstStyle/>
           <a:p>
+            <a:pPr algn="r">
+              <a:defRPr sz="1200" b="0">
+                <a:solidFill>
+                  <a:srgbClr val="164A61"/>
+                </a:solidFill>
+                <a:latin typeface="Aptos"/>
+              </a:defRPr>
+            </a:pPr>
+            <a:r>
+              <a:t>3</a:t>
+            </a:r>
+          </a:p>
+        </p:txBody>
+      </p:sp>
+      <p:sp>
+        <p:nvSpPr>
+          <p:cNvPr id="7" name="TextBox 6"/>
+          <p:cNvSpPr txBox="1"/>
+          <p:nvPr/>
+        </p:nvSpPr>
+        <p:spPr>
+          <a:xfrm>
+            <a:off x="777240" y="1828800"/>
+            <a:ext cx="10607040" cy="2560320"/>
+          </a:xfrm>
+          <a:prstGeom prst="rect">
+            <a:avLst/>
+          </a:prstGeom>
+          <a:noFill/>
+        </p:spPr>
+        <p:txBody>
+          <a:bodyPr wrap="square">
+            <a:spAutoFit/>
+          </a:bodyPr>
+          <a:lstStyle/>
+          <a:p>
             <a:pPr>
               <a:spcAft>
-                <a:spcPts val="400"/>
+                <a:spcPts val="1200"/>
               </a:spcAft>
-              <a:defRPr sz="1500">
-                <a:solidFill>
-                  <a:srgbClr val="122038"/>
+              <a:defRPr sz="2000">
+                <a:solidFill>
+                  <a:srgbClr val="164A61"/>
                 </a:solidFill>
                 <a:latin typeface="Aptos"/>
               </a:defRPr>
             </a:pPr>
             <a:r>
-              <a:t>Azure Boards intake</a:t>
-            </a:r>
-            <a:br/>
-            <a:r>
-              <a:t>Copilot implementation</a:t>
-            </a:r>
-            <a:br/>
-            <a:r>
-              <a:t>GitHub Actions gates</a:t>
-            </a:r>
-            <a:br/>
-            <a:r>
-              <a:t>Independent review and QA</a:t>
-            </a:r>
-          </a:p>
-        </p:txBody>
-      </p:sp>
-      <p:sp>
-        <p:nvSpPr>
-          <p:cNvPr id="12" name="Rounded Rectangle 11"/>
+              <a:t>•  Ask for the booking rules in plain language, with sources and revision.</a:t>
+            </a:r>
+          </a:p>
+          <a:p>
+            <a:pPr>
+              <a:spcAft>
+                <a:spcPts val="1200"/>
+              </a:spcAft>
+              <a:defRPr sz="2000">
+                <a:solidFill>
+                  <a:srgbClr val="164A61"/>
+                </a:solidFill>
+                <a:latin typeface="Aptos"/>
+              </a:defRPr>
+            </a:pPr>
+            <a:r>
+              <a:t>•  Repository knowledge works now; Search MCP needs a verified connection.</a:t>
+            </a:r>
+          </a:p>
+          <a:p>
+            <a:pPr>
+              <a:spcAft>
+                <a:spcPts val="1200"/>
+              </a:spcAft>
+              <a:defRPr sz="2000">
+                <a:solidFill>
+                  <a:srgbClr val="164A61"/>
+                </a:solidFill>
+                <a:latin typeface="Aptos"/>
+              </a:defRPr>
+            </a:pPr>
+            <a:r>
+              <a:t>•  For MCP, show the actual tool call and passage. Otherwise say it used repository files.</a:t>
+            </a:r>
+          </a:p>
+        </p:txBody>
+      </p:sp>
+      <p:sp>
+        <p:nvSpPr>
+          <p:cNvPr id="8" name="Rounded Rectangle 7"/>
           <p:cNvSpPr/>
           <p:nvPr/>
         </p:nvSpPr>
         <p:spPr>
           <a:xfrm>
-            <a:off x="8065008" y="1508760"/>
-            <a:ext cx="3474720" cy="3566160"/>
+            <a:off x="777240" y="4480560"/>
+            <a:ext cx="10607040" cy="1325880"/>
           </a:xfrm>
           <a:prstGeom prst="roundRect">
             <a:avLst/>
           </a:prstGeom>
           <a:solidFill>
-            <a:srgbClr val="F3F7FB"/>
+            <a:srgbClr val="8DC4E6"/>
           </a:solidFill>
-          <a:ln w="25400">
+          <a:ln>
             <a:solidFill>
-              <a:srgbClr val="107C41"/>
+              <a:srgbClr val="D4CDBF"/>
             </a:solidFill>
           </a:ln>
         </p:spPr>
@@ -3742,14 +4438,14 @@
       </p:sp>
       <p:sp>
         <p:nvSpPr>
-          <p:cNvPr id="13" name="TextBox 12"/>
+          <p:cNvPr id="9" name="TextBox 8"/>
           <p:cNvSpPr txBox="1"/>
           <p:nvPr/>
         </p:nvSpPr>
         <p:spPr>
           <a:xfrm>
-            <a:off x="8293608" y="1691639"/>
-            <a:ext cx="3017520" cy="411480"/>
+            <a:off x="1005840" y="4590288"/>
+            <a:ext cx="10149840" cy="320040"/>
           </a:xfrm>
           <a:prstGeom prst="rect">
             <a:avLst/>
@@ -3757,35 +4453,35 @@
           <a:noFill/>
         </p:spPr>
         <p:txBody>
-          <a:bodyPr wrap="none">
+          <a:bodyPr wrap="square">
             <a:spAutoFit/>
           </a:bodyPr>
           <a:lstStyle/>
           <a:p>
             <a:pPr>
-              <a:defRPr sz="1800" b="1">
-                <a:solidFill>
-                  <a:srgbClr val="107C41"/>
-                </a:solidFill>
-                <a:latin typeface="Aptos Display"/>
+              <a:defRPr sz="1700" b="1">
+                <a:solidFill>
+                  <a:srgbClr val="164A61"/>
+                </a:solidFill>
+                <a:latin typeface="Aptos"/>
               </a:defRPr>
             </a:pPr>
             <a:r>
-              <a:t>Human control</a:t>
-            </a:r>
-          </a:p>
-        </p:txBody>
-      </p:sp>
-      <p:sp>
-        <p:nvSpPr>
-          <p:cNvPr id="14" name="TextBox 13"/>
+              <a:t>Copy this prompt</a:t>
+            </a:r>
+          </a:p>
+        </p:txBody>
+      </p:sp>
+      <p:sp>
+        <p:nvSpPr>
+          <p:cNvPr id="10" name="TextBox 9"/>
           <p:cNvSpPr txBox="1"/>
           <p:nvPr/>
         </p:nvSpPr>
         <p:spPr>
           <a:xfrm>
-            <a:off x="8293608" y="2167128"/>
-            <a:ext cx="3017520" cy="2743200"/>
+            <a:off x="1005840" y="4983480"/>
+            <a:ext cx="10149840" cy="685800"/>
           </a:xfrm>
           <a:prstGeom prst="rect">
             <a:avLst/>
@@ -3793,36 +4489,21 @@
           <a:noFill/>
         </p:spPr>
         <p:txBody>
-          <a:bodyPr wrap="none">
+          <a:bodyPr wrap="square">
             <a:spAutoFit/>
           </a:bodyPr>
           <a:lstStyle/>
           <a:p>
             <a:pPr>
-              <a:spcAft>
-                <a:spcPts val="400"/>
-              </a:spcAft>
-              <a:defRPr sz="1500">
-                <a:solidFill>
-                  <a:srgbClr val="122038"/>
+              <a:defRPr sz="1800" b="0">
+                <a:solidFill>
+                  <a:srgbClr val="164A61"/>
                 </a:solidFill>
                 <a:latin typeface="Aptos"/>
               </a:defRPr>
             </a:pPr>
             <a:r>
-              <a:t>Requirement acceptance</a:t>
-            </a:r>
-            <a:br/>
-            <a:r>
-              <a:t>Review decisions</a:t>
-            </a:r>
-            <a:br/>
-            <a:r>
-              <a:t>Release approval</a:t>
-            </a:r>
-            <a:br/>
-            <a:r>
-              <a:t>Production authorization</a:t>
+              <a:t>Read the repository knowledge. Explain our booking rules and cite the documents and revision. Do not change anything.</a:t>
             </a:r>
           </a:p>
         </p:txBody>
@@ -3835,13 +4516,13 @@
 </p:sld>
 </file>
 
-<file path=ppt/slides/slide3.xml><?xml version="1.0" encoding="utf-8"?>
+<file path=ppt/slides/slide4.xml><?xml version="1.0" encoding="utf-8"?>
 <p:sld xmlns:a="http://schemas.openxmlformats.org/drawingml/2006/main" xmlns:p="http://schemas.openxmlformats.org/presentationml/2006/main" xmlns:r="http://schemas.openxmlformats.org/officeDocument/2006/relationships">
   <p:cSld>
     <p:bg>
       <p:bgPr>
         <a:solidFill>
-          <a:srgbClr val="FFFFFF"/>
+          <a:srgbClr val="F9F6EF"/>
         </a:solidFill>
         <a:effectLst/>
       </p:bgPr>
@@ -3861,7 +4542,7 @@
         </p:nvSpPr>
         <p:spPr>
           <a:xfrm>
-            <a:off x="594360" y="320040"/>
+            <a:off x="640080" y="411480"/>
             <a:ext cx="10972800" cy="640080"/>
           </a:xfrm>
           <a:prstGeom prst="rect">
@@ -3870,7 +4551,7 @@
           <a:noFill/>
         </p:spPr>
         <p:txBody>
-          <a:bodyPr wrap="none">
+          <a:bodyPr wrap="square">
             <a:spAutoFit/>
           </a:bodyPr>
           <a:lstStyle/>
@@ -3878,13 +4559,13 @@
             <a:pPr>
               <a:defRPr sz="3000" b="1">
                 <a:solidFill>
-                  <a:srgbClr val="122038"/>
-                </a:solidFill>
-                <a:latin typeface="Aptos Display"/>
+                  <a:srgbClr val="164A61"/>
+                </a:solidFill>
+                <a:latin typeface="Aptos"/>
               </a:defRPr>
             </a:pPr>
             <a:r>
-              <a:t>1. Start with product intent</a:t>
+              <a:t>3. Agree one small improvement</a:t>
             </a:r>
           </a:p>
         </p:txBody>
@@ -3897,8 +4578,8 @@
         </p:nvSpPr>
         <p:spPr>
           <a:xfrm>
-            <a:off x="621792" y="932688"/>
-            <a:ext cx="10789920" cy="411480"/>
+            <a:off x="658368" y="1097280"/>
+            <a:ext cx="10789920" cy="548640"/>
           </a:xfrm>
           <a:prstGeom prst="rect">
             <a:avLst/>
@@ -3906,21 +4587,21 @@
           <a:noFill/>
         </p:spPr>
         <p:txBody>
-          <a:bodyPr wrap="none">
+          <a:bodyPr wrap="square">
             <a:spAutoFit/>
           </a:bodyPr>
           <a:lstStyle/>
           <a:p>
             <a:pPr>
-              <a:defRPr sz="1400">
-                <a:solidFill>
-                  <a:srgbClr val="5A6777"/>
+              <a:defRPr sz="1600" b="0">
+                <a:solidFill>
+                  <a:srgbClr val="04668C"/>
                 </a:solidFill>
                 <a:latin typeface="Aptos"/>
               </a:defRPr>
             </a:pPr>
             <a:r>
-              <a:t>Use the latest main branch</a:t>
+              <a:t>No technical commands for the product owner</a:t>
             </a:r>
           </a:p>
         </p:txBody>
@@ -3933,14 +4614,14 @@
         </p:nvSpPr>
         <p:spPr>
           <a:xfrm>
-            <a:off x="0" y="6656832"/>
-            <a:ext cx="12191695" cy="201168"/>
+            <a:off x="0" y="6629400"/>
+            <a:ext cx="12191695" cy="228600"/>
           </a:xfrm>
           <a:prstGeom prst="rect">
             <a:avLst/>
           </a:prstGeom>
           <a:solidFill>
-            <a:srgbClr val="0078D4"/>
+            <a:srgbClr val="04668C"/>
           </a:solidFill>
           <a:ln>
             <a:noFill/>
@@ -3976,8 +4657,8 @@
         </p:nvSpPr>
         <p:spPr>
           <a:xfrm>
-            <a:off x="11521440" y="6419088"/>
-            <a:ext cx="365760" cy="228600"/>
+            <a:off x="658368" y="6217920"/>
+            <a:ext cx="9875520" cy="274320"/>
           </a:xfrm>
           <a:prstGeom prst="rect">
             <a:avLst/>
@@ -3985,20 +4666,21 @@
           <a:noFill/>
         </p:spPr>
         <p:txBody>
-          <a:bodyPr wrap="none">
+          <a:bodyPr wrap="square">
             <a:spAutoFit/>
           </a:bodyPr>
           <a:lstStyle/>
           <a:p>
-            <a:pPr algn="r">
-              <a:defRPr sz="1000">
-                <a:solidFill>
-                  <a:srgbClr val="5A6777"/>
-                </a:solidFill>
+            <a:pPr>
+              <a:defRPr sz="1200" b="0">
+                <a:solidFill>
+                  <a:srgbClr val="164A61"/>
+                </a:solidFill>
+                <a:latin typeface="Aptos"/>
               </a:defRPr>
             </a:pPr>
             <a:r>
-              <a:t>3</a:t>
+              <a:t>Development demo | Production remains manual</a:t>
             </a:r>
           </a:p>
         </p:txBody>
@@ -4011,8 +4693,8 @@
         </p:nvSpPr>
         <p:spPr>
           <a:xfrm>
-            <a:off x="731520" y="1508760"/>
-            <a:ext cx="10789920" cy="4480560"/>
+            <a:off x="10972800" y="6217920"/>
+            <a:ext cx="502920" cy="274320"/>
           </a:xfrm>
           <a:prstGeom prst="rect">
             <a:avLst/>
@@ -4025,91 +4707,127 @@
           </a:bodyPr>
           <a:lstStyle/>
           <a:p>
+            <a:pPr algn="r">
+              <a:defRPr sz="1200" b="0">
+                <a:solidFill>
+                  <a:srgbClr val="164A61"/>
+                </a:solidFill>
+                <a:latin typeface="Aptos"/>
+              </a:defRPr>
+            </a:pPr>
+            <a:r>
+              <a:t>4</a:t>
+            </a:r>
+          </a:p>
+        </p:txBody>
+      </p:sp>
+      <p:sp>
+        <p:nvSpPr>
+          <p:cNvPr id="7" name="TextBox 6"/>
+          <p:cNvSpPr txBox="1"/>
+          <p:nvPr/>
+        </p:nvSpPr>
+        <p:spPr>
+          <a:xfrm>
+            <a:off x="777240" y="1828800"/>
+            <a:ext cx="10607040" cy="2560320"/>
+          </a:xfrm>
+          <a:prstGeom prst="rect">
+            <a:avLst/>
+          </a:prstGeom>
+          <a:noFill/>
+        </p:spPr>
+        <p:txBody>
+          <a:bodyPr wrap="square">
+            <a:spAutoFit/>
+          </a:bodyPr>
+          <a:lstStyle/>
+          <a:p>
             <a:pPr>
               <a:spcAft>
-                <a:spcPts val="1400"/>
+                <a:spcPts val="1200"/>
               </a:spcAft>
-              <a:defRPr sz="2300">
-                <a:solidFill>
-                  <a:srgbClr val="122038"/>
+              <a:defRPr sz="2000">
+                <a:solidFill>
+                  <a:srgbClr val="164A61"/>
                 </a:solidFill>
                 <a:latin typeface="Aptos"/>
               </a:defRPr>
             </a:pPr>
             <a:r>
-              <a:t>•  Open the repository in GitHub Copilot Desktop.</a:t>
+              <a:t>•  Describe one new improvement and agree how to know it works.</a:t>
             </a:r>
           </a:p>
           <a:p>
             <a:pPr>
               <a:spcAft>
-                <a:spcPts val="1400"/>
+                <a:spcPts val="1200"/>
               </a:spcAft>
-              <a:defRPr sz="2300">
-                <a:solidFill>
-                  <a:srgbClr val="122038"/>
+              <a:defRPr sz="2000">
+                <a:solidFill>
+                  <a:srgbClr val="164A61"/>
                 </a:solidFill>
                 <a:latin typeface="Aptos"/>
               </a:defRPr>
             </a:pPr>
             <a:r>
-              <a:t>•  Ask Copilot to read AGENTS.md and docs/knowledge/.</a:t>
+              <a:t>•  Say: That looks good. Create the story.</a:t>
             </a:r>
           </a:p>
           <a:p>
             <a:pPr>
               <a:spcAft>
-                <a:spcPts val="1400"/>
+                <a:spcPts val="1200"/>
               </a:spcAft>
-              <a:defRPr sz="2300">
-                <a:solidFill>
-                  <a:srgbClr val="122038"/>
+              <a:defRPr sz="2000">
+                <a:solidFill>
+                  <a:srgbClr val="164A61"/>
                 </a:solidFill>
                 <a:latin typeface="Aptos"/>
               </a:defRPr>
             </a:pPr>
             <a:r>
-              <a:t>•  Refine one Hotel Web/API vertical slice.</a:t>
+              <a:t>•  Default: sample-project User Story, New, no github-synced tag.</a:t>
             </a:r>
           </a:p>
           <a:p>
             <a:pPr>
               <a:spcAft>
-                <a:spcPts val="1400"/>
+                <a:spcPts val="1200"/>
               </a:spcAft>
-              <a:defRPr sz="2300">
-                <a:solidFill>
-                  <a:srgbClr val="122038"/>
+              <a:defRPr sz="2000">
+                <a:solidFill>
+                  <a:srgbClr val="164A61"/>
                 </a:solidFill>
                 <a:latin typeface="Aptos"/>
               </a:defRPr>
             </a:pPr>
             <a:r>
-              <a:t>•  Confirm user outcome, failure behavior, and testable acceptance criteria.</a:t>
-            </a:r>
-          </a:p>
-        </p:txBody>
-      </p:sp>
-      <p:sp>
-        <p:nvSpPr>
-          <p:cNvPr id="7" name="Rounded Rectangle 6"/>
+              <a:t>•  Scheduled intake assigns a cloud developer; pickup can be delayed.</a:t>
+            </a:r>
+          </a:p>
+        </p:txBody>
+      </p:sp>
+      <p:sp>
+        <p:nvSpPr>
+          <p:cNvPr id="8" name="Rounded Rectangle 7"/>
           <p:cNvSpPr/>
           <p:nvPr/>
         </p:nvSpPr>
         <p:spPr>
           <a:xfrm>
-            <a:off x="914400" y="5074920"/>
-            <a:ext cx="10332720" cy="960120"/>
+            <a:off x="777240" y="4480560"/>
+            <a:ext cx="10607040" cy="1325880"/>
           </a:xfrm>
           <a:prstGeom prst="roundRect">
             <a:avLst/>
           </a:prstGeom>
           <a:solidFill>
-            <a:srgbClr val="F3F7FB"/>
+            <a:srgbClr val="8DC4E6"/>
           </a:solidFill>
-          <a:ln w="25400">
+          <a:ln>
             <a:solidFill>
-              <a:srgbClr val="0078D4"/>
+              <a:srgbClr val="D4CDBF"/>
             </a:solidFill>
           </a:ln>
         </p:spPr>
@@ -4137,50 +4855,14 @@
       </p:sp>
       <p:sp>
         <p:nvSpPr>
-          <p:cNvPr id="8" name="TextBox 7"/>
-          <p:cNvSpPr txBox="1"/>
-          <p:nvPr/>
-        </p:nvSpPr>
-        <p:spPr>
-          <a:xfrm>
-            <a:off x="1143000" y="5257800"/>
-            <a:ext cx="9875520" cy="411480"/>
-          </a:xfrm>
-          <a:prstGeom prst="rect">
-            <a:avLst/>
-          </a:prstGeom>
-          <a:noFill/>
-        </p:spPr>
-        <p:txBody>
-          <a:bodyPr wrap="none">
-            <a:spAutoFit/>
-          </a:bodyPr>
-          <a:lstStyle/>
-          <a:p>
-            <a:pPr>
-              <a:defRPr sz="1800" b="1">
-                <a:solidFill>
-                  <a:srgbClr val="0078D4"/>
-                </a:solidFill>
-                <a:latin typeface="Aptos Display"/>
-              </a:defRPr>
-            </a:pPr>
-            <a:r>
-              <a:t>Starter prompt</a:t>
-            </a:r>
-          </a:p>
-        </p:txBody>
-      </p:sp>
-      <p:sp>
-        <p:nvSpPr>
           <p:cNvPr id="9" name="TextBox 8"/>
           <p:cNvSpPr txBox="1"/>
           <p:nvPr/>
         </p:nvSpPr>
         <p:spPr>
           <a:xfrm>
-            <a:off x="1143000" y="5733288"/>
-            <a:ext cx="9875520" cy="137160"/>
+            <a:off x="1005840" y="4590288"/>
+            <a:ext cx="10149840" cy="320040"/>
           </a:xfrm>
           <a:prstGeom prst="rect">
             <a:avLst/>
@@ -4188,24 +4870,57 @@
           <a:noFill/>
         </p:spPr>
         <p:txBody>
-          <a:bodyPr wrap="none">
+          <a:bodyPr wrap="square">
             <a:spAutoFit/>
           </a:bodyPr>
           <a:lstStyle/>
           <a:p>
             <a:pPr>
-              <a:spcAft>
-                <a:spcPts val="400"/>
-              </a:spcAft>
-              <a:defRPr sz="1500">
-                <a:solidFill>
-                  <a:srgbClr val="122038"/>
+              <a:defRPr sz="1700" b="1">
+                <a:solidFill>
+                  <a:srgbClr val="164A61"/>
                 </a:solidFill>
                 <a:latin typeface="Aptos"/>
               </a:defRPr>
             </a:pPr>
             <a:r>
-              <a:t>Help me refine a Hotel Web/API requirement into one bounded vertical slice with testable acceptance criteria.</a:t>
+              <a:t>Read-only replay?</a:t>
+            </a:r>
+          </a:p>
+        </p:txBody>
+      </p:sp>
+      <p:sp>
+        <p:nvSpPr>
+          <p:cNvPr id="10" name="TextBox 9"/>
+          <p:cNvSpPr txBox="1"/>
+          <p:nvPr/>
+        </p:nvSpPr>
+        <p:spPr>
+          <a:xfrm>
+            <a:off x="1005840" y="4983480"/>
+            <a:ext cx="10149840" cy="685800"/>
+          </a:xfrm>
+          <a:prstGeom prst="rect">
+            <a:avLst/>
+          </a:prstGeom>
+          <a:noFill/>
+        </p:spPr>
+        <p:txBody>
+          <a:bodyPr wrap="square">
+            <a:spAutoFit/>
+          </a:bodyPr>
+          <a:lstStyle/>
+          <a:p>
+            <a:pPr>
+              <a:defRPr sz="1800" b="0">
+                <a:solidFill>
+                  <a:srgbClr val="164A61"/>
+                </a:solidFill>
+                <a:latin typeface="Aptos"/>
+              </a:defRPr>
+            </a:pPr>
+            <a:r>
+              <a:t>Skip story creation. It starts real work.</a:t>
             </a:r>
           </a:p>
         </p:txBody>
@@ -4218,13 +4933,13 @@
 </p:sld>
 </file>
 
-<file path=ppt/slides/slide4.xml><?xml version="1.0" encoding="utf-8"?>
+<file path=ppt/slides/slide5.xml><?xml version="1.0" encoding="utf-8"?>
 <p:sld xmlns:a="http://schemas.openxmlformats.org/drawingml/2006/main" xmlns:p="http://schemas.openxmlformats.org/presentationml/2006/main" xmlns:r="http://schemas.openxmlformats.org/officeDocument/2006/relationships">
   <p:cSld>
     <p:bg>
       <p:bgPr>
         <a:solidFill>
-          <a:srgbClr val="FFFFFF"/>
+          <a:srgbClr val="F9F6EF"/>
         </a:solidFill>
         <a:effectLst/>
       </p:bgPr>
@@ -4244,7 +4959,7 @@
         </p:nvSpPr>
         <p:spPr>
           <a:xfrm>
-            <a:off x="594360" y="320040"/>
+            <a:off x="640080" y="411480"/>
             <a:ext cx="10972800" cy="640080"/>
           </a:xfrm>
           <a:prstGeom prst="rect">
@@ -4253,7 +4968,7 @@
           <a:noFill/>
         </p:spPr>
         <p:txBody>
-          <a:bodyPr wrap="none">
+          <a:bodyPr wrap="square">
             <a:spAutoFit/>
           </a:bodyPr>
           <a:lstStyle/>
@@ -4261,33 +4976,69 @@
             <a:pPr>
               <a:defRPr sz="3000" b="1">
                 <a:solidFill>
-                  <a:srgbClr val="122038"/>
-                </a:solidFill>
-                <a:latin typeface="Aptos Display"/>
+                  <a:srgbClr val="164A61"/>
+                </a:solidFill>
+                <a:latin typeface="Aptos"/>
               </a:defRPr>
             </a:pPr>
             <a:r>
-              <a:t>2. Create the Azure Boards item</a:t>
-            </a:r>
-          </a:p>
-        </p:txBody>
-      </p:sp>
-      <p:sp>
-        <p:nvSpPr>
-          <p:cNvPr id="3" name="Rectangle 2"/>
+              <a:t>4. Follow one existing change</a:t>
+            </a:r>
+          </a:p>
+        </p:txBody>
+      </p:sp>
+      <p:sp>
+        <p:nvSpPr>
+          <p:cNvPr id="3" name="TextBox 2"/>
+          <p:cNvSpPr txBox="1"/>
+          <p:nvPr/>
+        </p:nvSpPr>
+        <p:spPr>
+          <a:xfrm>
+            <a:off x="658368" y="1097280"/>
+            <a:ext cx="10789920" cy="548640"/>
+          </a:xfrm>
+          <a:prstGeom prst="rect">
+            <a:avLst/>
+          </a:prstGeom>
+          <a:noFill/>
+        </p:spPr>
+        <p:txBody>
+          <a:bodyPr wrap="square">
+            <a:spAutoFit/>
+          </a:bodyPr>
+          <a:lstStyle/>
+          <a:p>
+            <a:pPr>
+              <a:defRPr sz="1600" b="0">
+                <a:solidFill>
+                  <a:srgbClr val="04668C"/>
+                </a:solidFill>
+                <a:latin typeface="Aptos"/>
+              </a:defRPr>
+            </a:pPr>
+            <a:r>
+              <a:t>Story -&gt; linked issue -&gt; pull request</a:t>
+            </a:r>
+          </a:p>
+        </p:txBody>
+      </p:sp>
+      <p:sp>
+        <p:nvSpPr>
+          <p:cNvPr id="4" name="Rectangle 3"/>
           <p:cNvSpPr/>
           <p:nvPr/>
         </p:nvSpPr>
         <p:spPr>
           <a:xfrm>
-            <a:off x="0" y="6656832"/>
-            <a:ext cx="12191695" cy="201168"/>
+            <a:off x="0" y="6629400"/>
+            <a:ext cx="12191695" cy="228600"/>
           </a:xfrm>
           <a:prstGeom prst="rect">
             <a:avLst/>
           </a:prstGeom>
           <a:solidFill>
-            <a:srgbClr val="0078D4"/>
+            <a:srgbClr val="04668C"/>
           </a:solidFill>
           <a:ln>
             <a:noFill/>
@@ -4317,49 +5068,14 @@
       </p:sp>
       <p:sp>
         <p:nvSpPr>
-          <p:cNvPr id="4" name="TextBox 3"/>
-          <p:cNvSpPr txBox="1"/>
-          <p:nvPr/>
-        </p:nvSpPr>
-        <p:spPr>
-          <a:xfrm>
-            <a:off x="11521440" y="6419088"/>
-            <a:ext cx="365760" cy="228600"/>
-          </a:xfrm>
-          <a:prstGeom prst="rect">
-            <a:avLst/>
-          </a:prstGeom>
-          <a:noFill/>
-        </p:spPr>
-        <p:txBody>
-          <a:bodyPr wrap="none">
-            <a:spAutoFit/>
-          </a:bodyPr>
-          <a:lstStyle/>
-          <a:p>
-            <a:pPr algn="r">
-              <a:defRPr sz="1000">
-                <a:solidFill>
-                  <a:srgbClr val="5A6777"/>
-                </a:solidFill>
-              </a:defRPr>
-            </a:pPr>
-            <a:r>
-              <a:t>4</a:t>
-            </a:r>
-          </a:p>
-        </p:txBody>
-      </p:sp>
-      <p:sp>
-        <p:nvSpPr>
           <p:cNvPr id="5" name="TextBox 4"/>
           <p:cNvSpPr txBox="1"/>
           <p:nvPr/>
         </p:nvSpPr>
         <p:spPr>
           <a:xfrm>
-            <a:off x="731520" y="1508760"/>
-            <a:ext cx="10789920" cy="4480560"/>
+            <a:off x="658368" y="6217920"/>
+            <a:ext cx="9875520" cy="274320"/>
           </a:xfrm>
           <a:prstGeom prst="rect">
             <a:avLst/>
@@ -4373,90 +5089,162 @@
           <a:lstStyle/>
           <a:p>
             <a:pPr>
-              <a:spcAft>
-                <a:spcPts val="1400"/>
-              </a:spcAft>
-              <a:defRPr sz="2300">
-                <a:solidFill>
-                  <a:srgbClr val="122038"/>
+              <a:defRPr sz="1200" b="0">
+                <a:solidFill>
+                  <a:srgbClr val="164A61"/>
                 </a:solidFill>
                 <a:latin typeface="Aptos"/>
               </a:defRPr>
             </a:pPr>
             <a:r>
-              <a:t>•  Create a User Story for new behavior or a Bug for a correction.</a:t>
-            </a:r>
-          </a:p>
+              <a:t>Development demo | Production remains manual</a:t>
+            </a:r>
+          </a:p>
+        </p:txBody>
+      </p:sp>
+      <p:sp>
+        <p:nvSpPr>
+          <p:cNvPr id="6" name="TextBox 5"/>
+          <p:cNvSpPr txBox="1"/>
+          <p:nvPr/>
+        </p:nvSpPr>
+        <p:spPr>
+          <a:xfrm>
+            <a:off x="10972800" y="6217920"/>
+            <a:ext cx="502920" cy="274320"/>
+          </a:xfrm>
+          <a:prstGeom prst="rect">
+            <a:avLst/>
+          </a:prstGeom>
+          <a:noFill/>
+        </p:spPr>
+        <p:txBody>
+          <a:bodyPr wrap="square">
+            <a:spAutoFit/>
+          </a:bodyPr>
+          <a:lstStyle/>
+          <a:p>
+            <a:pPr algn="r">
+              <a:defRPr sz="1200" b="0">
+                <a:solidFill>
+                  <a:srgbClr val="164A61"/>
+                </a:solidFill>
+                <a:latin typeface="Aptos"/>
+              </a:defRPr>
+            </a:pPr>
+            <a:r>
+              <a:t>5</a:t>
+            </a:r>
+          </a:p>
+        </p:txBody>
+      </p:sp>
+      <p:sp>
+        <p:nvSpPr>
+          <p:cNvPr id="7" name="TextBox 6"/>
+          <p:cNvSpPr txBox="1"/>
+          <p:nvPr/>
+        </p:nvSpPr>
+        <p:spPr>
+          <a:xfrm>
+            <a:off x="777240" y="1828800"/>
+            <a:ext cx="10607040" cy="2560320"/>
+          </a:xfrm>
+          <a:prstGeom prst="rect">
+            <a:avLst/>
+          </a:prstGeom>
+          <a:noFill/>
+        </p:spPr>
+        <p:txBody>
+          <a:bodyPr wrap="square">
+            <a:spAutoFit/>
+          </a:bodyPr>
+          <a:lstStyle/>
           <a:p>
             <a:pPr>
               <a:spcAft>
-                <a:spcPts val="1400"/>
+                <a:spcPts val="1200"/>
               </a:spcAft>
-              <a:defRPr sz="2300">
-                <a:solidFill>
-                  <a:srgbClr val="122038"/>
+              <a:defRPr sz="2000">
+                <a:solidFill>
+                  <a:srgbClr val="164A61"/>
                 </a:solidFill>
                 <a:latin typeface="Aptos"/>
               </a:defRPr>
             </a:pPr>
             <a:r>
-              <a:t>•  Target the sample-project Azure DevOps project.</a:t>
+              <a:t>•  Validation checks build and tests; Copilot reviews the exact revision.</a:t>
             </a:r>
           </a:p>
           <a:p>
             <a:pPr>
               <a:spcAft>
-                <a:spcPts val="1400"/>
+                <a:spcPts val="1200"/>
               </a:spcAft>
-              <a:defRPr sz="2300">
-                <a:solidFill>
-                  <a:srgbClr val="122038"/>
+              <a:defRPr sz="2000">
+                <a:solidFill>
+                  <a:srgbClr val="164A61"/>
                 </a:solidFill>
                 <a:latin typeface="Aptos"/>
               </a:defRPr>
             </a:pPr>
             <a:r>
-              <a:t>•  Leave the item in New.</a:t>
+              <a:t>•  QA saves workflow evidence; the custom QA agent is not yet automated.</a:t>
             </a:r>
           </a:p>
           <a:p>
             <a:pPr>
               <a:spcAft>
-                <a:spcPts val="1400"/>
+                <a:spcPts val="1200"/>
               </a:spcAft>
-              <a:defRPr sz="2300">
-                <a:solidFill>
-                  <a:srgbClr val="122038"/>
+              <a:defRPr sz="2000">
+                <a:solidFill>
+                  <a:srgbClr val="164A61"/>
                 </a:solidFill>
                 <a:latin typeface="Aptos"/>
               </a:defRPr>
             </a:pPr>
             <a:r>
-              <a:t>•  Do not add github-synced and do not manually create a GitHub issue.</a:t>
-            </a:r>
-          </a:p>
-        </p:txBody>
-      </p:sp>
-      <p:sp>
-        <p:nvSpPr>
-          <p:cNvPr id="6" name="Rounded Rectangle 5"/>
+              <a:t>•  One review alternative is normally skipped. It is not duplicate work.</a:t>
+            </a:r>
+          </a:p>
+          <a:p>
+            <a:pPr>
+              <a:spcAft>
+                <a:spcPts val="1200"/>
+              </a:spcAft>
+              <a:defRPr sz="2000">
+                <a:solidFill>
+                  <a:srgbClr val="164A61"/>
+                </a:solidFill>
+                <a:latin typeface="Aptos"/>
+              </a:defRPr>
+            </a:pPr>
+            <a:r>
+              <a:t>•  If checks are still running or fail, do not call the change delivered.</a:t>
+            </a:r>
+          </a:p>
+        </p:txBody>
+      </p:sp>
+      <p:sp>
+        <p:nvSpPr>
+          <p:cNvPr id="8" name="Rounded Rectangle 7"/>
           <p:cNvSpPr/>
           <p:nvPr/>
         </p:nvSpPr>
         <p:spPr>
           <a:xfrm>
-            <a:off x="914400" y="5074920"/>
-            <a:ext cx="10332720" cy="960120"/>
+            <a:off x="777240" y="4480560"/>
+            <a:ext cx="10607040" cy="1325880"/>
           </a:xfrm>
           <a:prstGeom prst="roundRect">
             <a:avLst/>
           </a:prstGeom>
           <a:solidFill>
-            <a:srgbClr val="F3F7FB"/>
+            <a:srgbClr val="8DC4E6"/>
           </a:solidFill>
-          <a:ln w="25400">
+          <a:ln>
             <a:solidFill>
-              <a:srgbClr val="009999"/>
+              <a:srgbClr val="D4CDBF"/>
             </a:solidFill>
           </a:ln>
         </p:spPr>
@@ -4484,14 +5272,14 @@
       </p:sp>
       <p:sp>
         <p:nvSpPr>
-          <p:cNvPr id="7" name="TextBox 6"/>
+          <p:cNvPr id="9" name="TextBox 8"/>
           <p:cNvSpPr txBox="1"/>
           <p:nvPr/>
         </p:nvSpPr>
         <p:spPr>
           <a:xfrm>
-            <a:off x="1143000" y="5257800"/>
-            <a:ext cx="9875520" cy="411480"/>
+            <a:off x="1005840" y="4590288"/>
+            <a:ext cx="10149840" cy="320040"/>
           </a:xfrm>
           <a:prstGeom prst="rect">
             <a:avLst/>
@@ -4499,35 +5287,35 @@
           <a:noFill/>
         </p:spPr>
         <p:txBody>
-          <a:bodyPr wrap="none">
+          <a:bodyPr wrap="square">
             <a:spAutoFit/>
           </a:bodyPr>
           <a:lstStyle/>
           <a:p>
             <a:pPr>
-              <a:defRPr sz="1800" b="1">
-                <a:solidFill>
-                  <a:srgbClr val="009999"/>
-                </a:solidFill>
-                <a:latin typeface="Aptos Display"/>
+              <a:defRPr sz="1700" b="1">
+                <a:solidFill>
+                  <a:srgbClr val="164A61"/>
+                </a:solidFill>
+                <a:latin typeface="Aptos"/>
               </a:defRPr>
             </a:pPr>
             <a:r>
-              <a:t>Creation prompt</a:t>
-            </a:r>
-          </a:p>
-        </p:txBody>
-      </p:sp>
-      <p:sp>
-        <p:nvSpPr>
-          <p:cNvPr id="8" name="TextBox 7"/>
+              <a:t>Where to look</a:t>
+            </a:r>
+          </a:p>
+        </p:txBody>
+      </p:sp>
+      <p:sp>
+        <p:nvSpPr>
+          <p:cNvPr id="10" name="TextBox 9"/>
           <p:cNvSpPr txBox="1"/>
           <p:nvPr/>
         </p:nvSpPr>
         <p:spPr>
           <a:xfrm>
-            <a:off x="1143000" y="5733288"/>
-            <a:ext cx="9875520" cy="137160"/>
+            <a:off x="1005840" y="4983480"/>
+            <a:ext cx="10149840" cy="685800"/>
           </a:xfrm>
           <a:prstGeom prst="rect">
             <a:avLst/>
@@ -4535,24 +5323,21 @@
           <a:noFill/>
         </p:spPr>
         <p:txBody>
-          <a:bodyPr wrap="none">
+          <a:bodyPr wrap="square">
             <a:spAutoFit/>
           </a:bodyPr>
           <a:lstStyle/>
           <a:p>
             <a:pPr>
-              <a:spcAft>
-                <a:spcPts val="400"/>
-              </a:spcAft>
-              <a:defRPr sz="1500">
-                <a:solidFill>
-                  <a:srgbClr val="122038"/>
+              <a:defRPr sz="1800" b="0">
+                <a:solidFill>
+                  <a:srgbClr val="164A61"/>
                 </a:solidFill>
                 <a:latin typeface="Aptos"/>
               </a:defRPr>
             </a:pPr>
             <a:r>
-              <a:t>Create this in Azure Boards, leave it in New, and do not add github-synced.</a:t>
+              <a:t>Use Boards and GitHub. Agent Operations is not a mirror of every delivery step.</a:t>
             </a:r>
           </a:p>
         </p:txBody>
@@ -4565,13 +5350,13 @@
 </p:sld>
 </file>
 
-<file path=ppt/slides/slide5.xml><?xml version="1.0" encoding="utf-8"?>
+<file path=ppt/slides/slide6.xml><?xml version="1.0" encoding="utf-8"?>
 <p:sld xmlns:a="http://schemas.openxmlformats.org/drawingml/2006/main" xmlns:p="http://schemas.openxmlformats.org/presentationml/2006/main" xmlns:r="http://schemas.openxmlformats.org/officeDocument/2006/relationships">
   <p:cSld>
     <p:bg>
       <p:bgPr>
         <a:solidFill>
-          <a:srgbClr val="FFFFFF"/>
+          <a:srgbClr val="F9F6EF"/>
         </a:solidFill>
         <a:effectLst/>
       </p:bgPr>
@@ -4591,7 +5376,7 @@
         </p:nvSpPr>
         <p:spPr>
           <a:xfrm>
-            <a:off x="594360" y="320040"/>
+            <a:off x="640080" y="411480"/>
             <a:ext cx="10972800" cy="640080"/>
           </a:xfrm>
           <a:prstGeom prst="rect">
@@ -4600,7 +5385,7 @@
           <a:noFill/>
         </p:spPr>
         <p:txBody>
-          <a:bodyPr wrap="none">
+          <a:bodyPr wrap="square">
             <a:spAutoFit/>
           </a:bodyPr>
           <a:lstStyle/>
@@ -4608,13 +5393,13 @@
             <a:pPr>
               <a:defRPr sz="3000" b="1">
                 <a:solidFill>
-                  <a:srgbClr val="122038"/>
-                </a:solidFill>
-                <a:latin typeface="Aptos Display"/>
+                  <a:srgbClr val="164A61"/>
+                </a:solidFill>
+                <a:latin typeface="Aptos"/>
               </a:defRPr>
             </a:pPr>
             <a:r>
-              <a:t>3. Watch automatic intake</a:t>
+              <a:t>5. Show the development result</a:t>
             </a:r>
           </a:p>
         </p:txBody>
@@ -4627,8 +5412,8 @@
         </p:nvSpPr>
         <p:spPr>
           <a:xfrm>
-            <a:off x="621792" y="932688"/>
-            <a:ext cx="10789920" cy="411480"/>
+            <a:off x="658368" y="1097280"/>
+            <a:ext cx="10789920" cy="548640"/>
           </a:xfrm>
           <a:prstGeom prst="rect">
             <a:avLst/>
@@ -4636,21 +5421,21 @@
           <a:noFill/>
         </p:spPr>
         <p:txBody>
-          <a:bodyPr wrap="none">
+          <a:bodyPr wrap="square">
             <a:spAutoFit/>
           </a:bodyPr>
           <a:lstStyle/>
           <a:p>
             <a:pPr>
-              <a:defRPr sz="1400">
-                <a:solidFill>
-                  <a:srgbClr val="5A6777"/>
+              <a:defRPr sz="1600" b="0">
+                <a:solidFill>
+                  <a:srgbClr val="04668C"/>
                 </a:solidFill>
                 <a:latin typeface="Aptos"/>
               </a:defRPr>
             </a:pPr>
             <a:r>
-              <a:t>Polling runs every five minutes</a:t>
+              <a:t>No extra human release approval for this demo</a:t>
             </a:r>
           </a:p>
         </p:txBody>
@@ -4663,14 +5448,14 @@
         </p:nvSpPr>
         <p:spPr>
           <a:xfrm>
-            <a:off x="0" y="6656832"/>
-            <a:ext cx="12191695" cy="201168"/>
+            <a:off x="0" y="6629400"/>
+            <a:ext cx="12191695" cy="228600"/>
           </a:xfrm>
           <a:prstGeom prst="rect">
             <a:avLst/>
           </a:prstGeom>
           <a:solidFill>
-            <a:srgbClr val="0078D4"/>
+            <a:srgbClr val="04668C"/>
           </a:solidFill>
           <a:ln>
             <a:noFill/>
@@ -4706,8 +5491,8 @@
         </p:nvSpPr>
         <p:spPr>
           <a:xfrm>
-            <a:off x="11521440" y="6419088"/>
-            <a:ext cx="365760" cy="228600"/>
+            <a:off x="658368" y="6217920"/>
+            <a:ext cx="9875520" cy="274320"/>
           </a:xfrm>
           <a:prstGeom prst="rect">
             <a:avLst/>
@@ -4715,43 +5500,169 @@
           <a:noFill/>
         </p:spPr>
         <p:txBody>
-          <a:bodyPr wrap="none">
+          <a:bodyPr wrap="square">
             <a:spAutoFit/>
           </a:bodyPr>
           <a:lstStyle/>
           <a:p>
+            <a:pPr>
+              <a:defRPr sz="1200" b="0">
+                <a:solidFill>
+                  <a:srgbClr val="164A61"/>
+                </a:solidFill>
+                <a:latin typeface="Aptos"/>
+              </a:defRPr>
+            </a:pPr>
+            <a:r>
+              <a:t>Development demo | Production remains manual</a:t>
+            </a:r>
+          </a:p>
+        </p:txBody>
+      </p:sp>
+      <p:sp>
+        <p:nvSpPr>
+          <p:cNvPr id="6" name="TextBox 5"/>
+          <p:cNvSpPr txBox="1"/>
+          <p:nvPr/>
+        </p:nvSpPr>
+        <p:spPr>
+          <a:xfrm>
+            <a:off x="10972800" y="6217920"/>
+            <a:ext cx="502920" cy="274320"/>
+          </a:xfrm>
+          <a:prstGeom prst="rect">
+            <a:avLst/>
+          </a:prstGeom>
+          <a:noFill/>
+        </p:spPr>
+        <p:txBody>
+          <a:bodyPr wrap="square">
+            <a:spAutoFit/>
+          </a:bodyPr>
+          <a:lstStyle/>
+          <a:p>
             <a:pPr algn="r">
-              <a:defRPr sz="1000">
-                <a:solidFill>
-                  <a:srgbClr val="5A6777"/>
-                </a:solidFill>
+              <a:defRPr sz="1200" b="0">
+                <a:solidFill>
+                  <a:srgbClr val="164A61"/>
+                </a:solidFill>
+                <a:latin typeface="Aptos"/>
               </a:defRPr>
             </a:pPr>
             <a:r>
-              <a:t>5</a:t>
-            </a:r>
-          </a:p>
-        </p:txBody>
-      </p:sp>
-      <p:sp>
-        <p:nvSpPr>
-          <p:cNvPr id="6" name="Rounded Rectangle 5"/>
+              <a:t>6</a:t>
+            </a:r>
+          </a:p>
+        </p:txBody>
+      </p:sp>
+      <p:sp>
+        <p:nvSpPr>
+          <p:cNvPr id="7" name="TextBox 6"/>
+          <p:cNvSpPr txBox="1"/>
+          <p:nvPr/>
+        </p:nvSpPr>
+        <p:spPr>
+          <a:xfrm>
+            <a:off x="777240" y="1828800"/>
+            <a:ext cx="10607040" cy="2560320"/>
+          </a:xfrm>
+          <a:prstGeom prst="rect">
+            <a:avLst/>
+          </a:prstGeom>
+          <a:noFill/>
+        </p:spPr>
+        <p:txBody>
+          <a:bodyPr wrap="square">
+            <a:spAutoFit/>
+          </a:bodyPr>
+          <a:lstStyle/>
+          <a:p>
+            <a:pPr>
+              <a:spcAft>
+                <a:spcPts val="1200"/>
+              </a:spcAft>
+              <a:defRPr sz="2000">
+                <a:solidFill>
+                  <a:srgbClr val="164A61"/>
+                </a:solidFill>
+                <a:latin typeface="Aptos"/>
+              </a:defRPr>
+            </a:pPr>
+            <a:r>
+              <a:t>•  Once required checks pass, the coordinator can merge without asking again.</a:t>
+            </a:r>
+          </a:p>
+          <a:p>
+            <a:pPr>
+              <a:spcAft>
+                <a:spcPts val="1200"/>
+              </a:spcAft>
+              <a:defRPr sz="2000">
+                <a:solidFill>
+                  <a:srgbClr val="164A61"/>
+                </a:solidFill>
+                <a:latin typeface="Aptos"/>
+              </a:defRPr>
+            </a:pPr>
+            <a:r>
+              <a:t>•  Merge starts development deployment. Show the result only after success.</a:t>
+            </a:r>
+          </a:p>
+          <a:p>
+            <a:pPr>
+              <a:spcAft>
+                <a:spcPts val="1200"/>
+              </a:spcAft>
+              <a:defRPr sz="2000">
+                <a:solidFill>
+                  <a:srgbClr val="164A61"/>
+                </a:solidFill>
+                <a:latin typeface="Aptos"/>
+              </a:defRPr>
+            </a:pPr>
+            <a:r>
+              <a:t>•  Workflow execution approval is separate. Production stays manual.</a:t>
+            </a:r>
+          </a:p>
+          <a:p>
+            <a:pPr>
+              <a:spcAft>
+                <a:spcPts val="1200"/>
+              </a:spcAft>
+              <a:defRPr sz="2000">
+                <a:solidFill>
+                  <a:srgbClr val="164A61"/>
+                </a:solidFill>
+                <a:latin typeface="Aptos"/>
+              </a:defRPr>
+            </a:pPr>
+            <a:r>
+              <a:t>•  Prove MCP chat retrieval first; verify development-agent access separately.</a:t>
+            </a:r>
+          </a:p>
+        </p:txBody>
+      </p:sp>
+      <p:sp>
+        <p:nvSpPr>
+          <p:cNvPr id="8" name="Rounded Rectangle 7"/>
           <p:cNvSpPr/>
           <p:nvPr/>
         </p:nvSpPr>
         <p:spPr>
           <a:xfrm>
-            <a:off x="594360" y="2743200"/>
-            <a:ext cx="2092147" cy="960120"/>
+            <a:off x="777240" y="4480560"/>
+            <a:ext cx="10607040" cy="1325880"/>
           </a:xfrm>
           <a:prstGeom prst="roundRect">
             <a:avLst/>
           </a:prstGeom>
           <a:solidFill>
-            <a:srgbClr val="0078D4"/>
+            <a:srgbClr val="8DC4E6"/>
           </a:solidFill>
           <a:ln>
-            <a:noFill/>
+            <a:solidFill>
+              <a:srgbClr val="D4CDBF"/>
+            </a:solidFill>
           </a:ln>
         </p:spPr>
         <p:style>
@@ -4772,105 +5683,7 @@
           <a:bodyPr rtlCol="0" anchor="ctr"/>
           <a:lstStyle/>
           <a:p>
-            <a:pPr algn="ctr">
-              <a:defRPr sz="1400" b="1">
-                <a:solidFill>
-                  <a:srgbClr val="FFFFFF"/>
-                </a:solidFill>
-                <a:latin typeface="Aptos"/>
-              </a:defRPr>
-            </a:pPr>
-            <a:r>
-              <a:t>New AB item</a:t>
-            </a:r>
-          </a:p>
-        </p:txBody>
-      </p:sp>
-      <p:sp>
-        <p:nvSpPr>
-          <p:cNvPr id="7" name="TextBox 6"/>
-          <p:cNvSpPr txBox="1"/>
-          <p:nvPr/>
-        </p:nvSpPr>
-        <p:spPr>
-          <a:xfrm>
-            <a:off x="2668219" y="3035808"/>
-            <a:ext cx="173736" cy="320040"/>
-          </a:xfrm>
-          <a:prstGeom prst="rect">
-            <a:avLst/>
-          </a:prstGeom>
-          <a:noFill/>
-        </p:spPr>
-        <p:txBody>
-          <a:bodyPr wrap="none">
-            <a:spAutoFit/>
-          </a:bodyPr>
-          <a:lstStyle/>
-          <a:p>
-            <a:pPr algn="ctr">
-              <a:defRPr b="1">
-                <a:solidFill>
-                  <a:srgbClr val="5A6777"/>
-                </a:solidFill>
-              </a:defRPr>
-            </a:pPr>
-            <a:r>
-              <a:t>&gt;</a:t>
-            </a:r>
-          </a:p>
-        </p:txBody>
-      </p:sp>
-      <p:sp>
-        <p:nvSpPr>
-          <p:cNvPr id="8" name="Rounded Rectangle 7"/>
-          <p:cNvSpPr/>
-          <p:nvPr/>
-        </p:nvSpPr>
-        <p:spPr>
-          <a:xfrm>
-            <a:off x="2814523" y="2743200"/>
-            <a:ext cx="2092147" cy="960120"/>
-          </a:xfrm>
-          <a:prstGeom prst="roundRect">
-            <a:avLst/>
-          </a:prstGeom>
-          <a:solidFill>
-            <a:srgbClr val="009999"/>
-          </a:solidFill>
-          <a:ln>
-            <a:noFill/>
-          </a:ln>
-        </p:spPr>
-        <p:style>
-          <a:lnRef idx="1">
-            <a:schemeClr val="accent1"/>
-          </a:lnRef>
-          <a:fillRef idx="3">
-            <a:schemeClr val="accent1"/>
-          </a:fillRef>
-          <a:effectRef idx="2">
-            <a:schemeClr val="accent1"/>
-          </a:effectRef>
-          <a:fontRef idx="minor">
-            <a:schemeClr val="lt1"/>
-          </a:fontRef>
-        </p:style>
-        <p:txBody>
-          <a:bodyPr rtlCol="0" anchor="ctr"/>
-          <a:lstStyle/>
-          <a:p>
-            <a:pPr algn="ctr">
-              <a:defRPr sz="1400" b="1">
-                <a:solidFill>
-                  <a:srgbClr val="FFFFFF"/>
-                </a:solidFill>
-                <a:latin typeface="Aptos"/>
-              </a:defRPr>
-            </a:pPr>
-            <a:r>
-              <a:t>Intake</a:t>
-            </a:r>
+            <a:pPr algn="ctr"/>
           </a:p>
         </p:txBody>
       </p:sp>
@@ -4882,272 +5695,8 @@
         </p:nvSpPr>
         <p:spPr>
           <a:xfrm>
-            <a:off x="4888382" y="3035808"/>
-            <a:ext cx="173736" cy="320040"/>
-          </a:xfrm>
-          <a:prstGeom prst="rect">
-            <a:avLst/>
-          </a:prstGeom>
-          <a:noFill/>
-        </p:spPr>
-        <p:txBody>
-          <a:bodyPr wrap="none">
-            <a:spAutoFit/>
-          </a:bodyPr>
-          <a:lstStyle/>
-          <a:p>
-            <a:pPr algn="ctr">
-              <a:defRPr b="1">
-                <a:solidFill>
-                  <a:srgbClr val="5A6777"/>
-                </a:solidFill>
-              </a:defRPr>
-            </a:pPr>
-            <a:r>
-              <a:t>&gt;</a:t>
-            </a:r>
-          </a:p>
-        </p:txBody>
-      </p:sp>
-      <p:sp>
-        <p:nvSpPr>
-          <p:cNvPr id="10" name="Rounded Rectangle 9"/>
-          <p:cNvSpPr/>
-          <p:nvPr/>
-        </p:nvSpPr>
-        <p:spPr>
-          <a:xfrm>
-            <a:off x="5034686" y="2743200"/>
-            <a:ext cx="2092147" cy="960120"/>
-          </a:xfrm>
-          <a:prstGeom prst="roundRect">
-            <a:avLst/>
-          </a:prstGeom>
-          <a:solidFill>
-            <a:srgbClr val="107C41"/>
-          </a:solidFill>
-          <a:ln>
-            <a:noFill/>
-          </a:ln>
-        </p:spPr>
-        <p:style>
-          <a:lnRef idx="1">
-            <a:schemeClr val="accent1"/>
-          </a:lnRef>
-          <a:fillRef idx="3">
-            <a:schemeClr val="accent1"/>
-          </a:fillRef>
-          <a:effectRef idx="2">
-            <a:schemeClr val="accent1"/>
-          </a:effectRef>
-          <a:fontRef idx="minor">
-            <a:schemeClr val="lt1"/>
-          </a:fontRef>
-        </p:style>
-        <p:txBody>
-          <a:bodyPr rtlCol="0" anchor="ctr"/>
-          <a:lstStyle/>
-          <a:p>
-            <a:pPr algn="ctr">
-              <a:defRPr sz="1400" b="1">
-                <a:solidFill>
-                  <a:srgbClr val="FFFFFF"/>
-                </a:solidFill>
-                <a:latin typeface="Aptos"/>
-              </a:defRPr>
-            </a:pPr>
-            <a:r>
-              <a:t>GitHub issue</a:t>
-            </a:r>
-          </a:p>
-        </p:txBody>
-      </p:sp>
-      <p:sp>
-        <p:nvSpPr>
-          <p:cNvPr id="11" name="TextBox 10"/>
-          <p:cNvSpPr txBox="1"/>
-          <p:nvPr/>
-        </p:nvSpPr>
-        <p:spPr>
-          <a:xfrm>
-            <a:off x="7108545" y="3035808"/>
-            <a:ext cx="173736" cy="320040"/>
-          </a:xfrm>
-          <a:prstGeom prst="rect">
-            <a:avLst/>
-          </a:prstGeom>
-          <a:noFill/>
-        </p:spPr>
-        <p:txBody>
-          <a:bodyPr wrap="none">
-            <a:spAutoFit/>
-          </a:bodyPr>
-          <a:lstStyle/>
-          <a:p>
-            <a:pPr algn="ctr">
-              <a:defRPr b="1">
-                <a:solidFill>
-                  <a:srgbClr val="5A6777"/>
-                </a:solidFill>
-              </a:defRPr>
-            </a:pPr>
-            <a:r>
-              <a:t>&gt;</a:t>
-            </a:r>
-          </a:p>
-        </p:txBody>
-      </p:sp>
-      <p:sp>
-        <p:nvSpPr>
-          <p:cNvPr id="12" name="Rounded Rectangle 11"/>
-          <p:cNvSpPr/>
-          <p:nvPr/>
-        </p:nvSpPr>
-        <p:spPr>
-          <a:xfrm>
-            <a:off x="7254849" y="2743200"/>
-            <a:ext cx="2092147" cy="960120"/>
-          </a:xfrm>
-          <a:prstGeom prst="roundRect">
-            <a:avLst/>
-          </a:prstGeom>
-          <a:solidFill>
-            <a:srgbClr val="CA5010"/>
-          </a:solidFill>
-          <a:ln>
-            <a:noFill/>
-          </a:ln>
-        </p:spPr>
-        <p:style>
-          <a:lnRef idx="1">
-            <a:schemeClr val="accent1"/>
-          </a:lnRef>
-          <a:fillRef idx="3">
-            <a:schemeClr val="accent1"/>
-          </a:fillRef>
-          <a:effectRef idx="2">
-            <a:schemeClr val="accent1"/>
-          </a:effectRef>
-          <a:fontRef idx="minor">
-            <a:schemeClr val="lt1"/>
-          </a:fontRef>
-        </p:style>
-        <p:txBody>
-          <a:bodyPr rtlCol="0" anchor="ctr"/>
-          <a:lstStyle/>
-          <a:p>
-            <a:pPr algn="ctr">
-              <a:defRPr sz="1400" b="1">
-                <a:solidFill>
-                  <a:srgbClr val="FFFFFF"/>
-                </a:solidFill>
-                <a:latin typeface="Aptos"/>
-              </a:defRPr>
-            </a:pPr>
-            <a:r>
-              <a:t>Agent assigned</a:t>
-            </a:r>
-          </a:p>
-        </p:txBody>
-      </p:sp>
-      <p:sp>
-        <p:nvSpPr>
-          <p:cNvPr id="13" name="TextBox 12"/>
-          <p:cNvSpPr txBox="1"/>
-          <p:nvPr/>
-        </p:nvSpPr>
-        <p:spPr>
-          <a:xfrm>
-            <a:off x="9328708" y="3035808"/>
-            <a:ext cx="173736" cy="320040"/>
-          </a:xfrm>
-          <a:prstGeom prst="rect">
-            <a:avLst/>
-          </a:prstGeom>
-          <a:noFill/>
-        </p:spPr>
-        <p:txBody>
-          <a:bodyPr wrap="none">
-            <a:spAutoFit/>
-          </a:bodyPr>
-          <a:lstStyle/>
-          <a:p>
-            <a:pPr algn="ctr">
-              <a:defRPr b="1">
-                <a:solidFill>
-                  <a:srgbClr val="5A6777"/>
-                </a:solidFill>
-              </a:defRPr>
-            </a:pPr>
-            <a:r>
-              <a:t>&gt;</a:t>
-            </a:r>
-          </a:p>
-        </p:txBody>
-      </p:sp>
-      <p:sp>
-        <p:nvSpPr>
-          <p:cNvPr id="14" name="Rounded Rectangle 13"/>
-          <p:cNvSpPr/>
-          <p:nvPr/>
-        </p:nvSpPr>
-        <p:spPr>
-          <a:xfrm>
-            <a:off x="9475012" y="2743200"/>
-            <a:ext cx="2092147" cy="960120"/>
-          </a:xfrm>
-          <a:prstGeom prst="roundRect">
-            <a:avLst/>
-          </a:prstGeom>
-          <a:solidFill>
-            <a:srgbClr val="0078D4"/>
-          </a:solidFill>
-          <a:ln>
-            <a:noFill/>
-          </a:ln>
-        </p:spPr>
-        <p:style>
-          <a:lnRef idx="1">
-            <a:schemeClr val="accent1"/>
-          </a:lnRef>
-          <a:fillRef idx="3">
-            <a:schemeClr val="accent1"/>
-          </a:fillRef>
-          <a:effectRef idx="2">
-            <a:schemeClr val="accent1"/>
-          </a:effectRef>
-          <a:fontRef idx="minor">
-            <a:schemeClr val="lt1"/>
-          </a:fontRef>
-        </p:style>
-        <p:txBody>
-          <a:bodyPr rtlCol="0" anchor="ctr"/>
-          <a:lstStyle/>
-          <a:p>
-            <a:pPr algn="ctr">
-              <a:defRPr sz="1400" b="1">
-                <a:solidFill>
-                  <a:srgbClr val="FFFFFF"/>
-                </a:solidFill>
-                <a:latin typeface="Aptos"/>
-              </a:defRPr>
-            </a:pPr>
-            <a:r>
-              <a:t>AB Active</a:t>
-            </a:r>
-          </a:p>
-        </p:txBody>
-      </p:sp>
-      <p:sp>
-        <p:nvSpPr>
-          <p:cNvPr id="15" name="TextBox 14"/>
-          <p:cNvSpPr txBox="1"/>
-          <p:nvPr/>
-        </p:nvSpPr>
-        <p:spPr>
-          <a:xfrm>
-            <a:off x="731520" y="4160520"/>
-            <a:ext cx="10789920" cy="1554480"/>
+            <a:off x="1005840" y="4590288"/>
+            <a:ext cx="10149840" cy="320040"/>
           </a:xfrm>
           <a:prstGeom prst="rect">
             <a:avLst/>
@@ -5161,419 +5710,15 @@
           <a:lstStyle/>
           <a:p>
             <a:pPr>
-              <a:spcAft>
-                <a:spcPts val="1400"/>
-              </a:spcAft>
-              <a:defRPr sz="2300">
-                <a:solidFill>
-                  <a:srgbClr val="122038"/>
+              <a:defRPr sz="1700" b="1">
+                <a:solidFill>
+                  <a:srgbClr val="164A61"/>
                 </a:solidFill>
                 <a:latin typeface="Aptos"/>
               </a:defRPr>
             </a:pPr>
             <a:r>
-              <a:t>•  The linked GitHub issue contains the acceptance criteria and AB# reference.</a:t>
-            </a:r>
-          </a:p>
-          <a:p>
-            <a:pPr>
-              <a:spcAft>
-                <a:spcPts val="1400"/>
-              </a:spcAft>
-              <a:defRPr sz="2300">
-                <a:solidFill>
-                  <a:srgbClr val="122038"/>
-                </a:solidFill>
-                <a:latin typeface="Aptos"/>
-              </a:defRPr>
-            </a:pPr>
-            <a:r>
-              <a:t>•  github-synced prevents duplicate dispatch.</a:t>
-            </a:r>
-          </a:p>
-          <a:p>
-            <a:pPr>
-              <a:spcAft>
-                <a:spcPts val="1400"/>
-              </a:spcAft>
-              <a:defRPr sz="2300">
-                <a:solidFill>
-                  <a:srgbClr val="122038"/>
-                </a:solidFill>
-                <a:latin typeface="Aptos"/>
-              </a:defRPr>
-            </a:pPr>
-            <a:r>
-              <a:t>•  The Hotel developer agent receives the bounded implementation contract.</a:t>
-            </a:r>
-          </a:p>
-        </p:txBody>
-      </p:sp>
-    </p:spTree>
-  </p:cSld>
-  <p:clrMapOvr>
-    <a:masterClrMapping/>
-  </p:clrMapOvr>
-</p:sld>
-</file>
-
-<file path=ppt/slides/slide6.xml><?xml version="1.0" encoding="utf-8"?>
-<p:sld xmlns:a="http://schemas.openxmlformats.org/drawingml/2006/main" xmlns:p="http://schemas.openxmlformats.org/presentationml/2006/main" xmlns:r="http://schemas.openxmlformats.org/officeDocument/2006/relationships">
-  <p:cSld>
-    <p:bg>
-      <p:bgPr>
-        <a:solidFill>
-          <a:srgbClr val="FFFFFF"/>
-        </a:solidFill>
-        <a:effectLst/>
-      </p:bgPr>
-    </p:bg>
-    <p:spTree>
-      <p:nvGrpSpPr>
-        <p:cNvPr id="1" name=""/>
-        <p:cNvGrpSpPr/>
-        <p:nvPr/>
-      </p:nvGrpSpPr>
-      <p:grpSpPr/>
-      <p:sp>
-        <p:nvSpPr>
-          <p:cNvPr id="2" name="TextBox 1"/>
-          <p:cNvSpPr txBox="1"/>
-          <p:nvPr/>
-        </p:nvSpPr>
-        <p:spPr>
-          <a:xfrm>
-            <a:off x="594360" y="320040"/>
-            <a:ext cx="10972800" cy="640080"/>
-          </a:xfrm>
-          <a:prstGeom prst="rect">
-            <a:avLst/>
-          </a:prstGeom>
-          <a:noFill/>
-        </p:spPr>
-        <p:txBody>
-          <a:bodyPr wrap="none">
-            <a:spAutoFit/>
-          </a:bodyPr>
-          <a:lstStyle/>
-          <a:p>
-            <a:pPr>
-              <a:defRPr sz="3000" b="1">
-                <a:solidFill>
-                  <a:srgbClr val="122038"/>
-                </a:solidFill>
-                <a:latin typeface="Aptos Display"/>
-              </a:defRPr>
-            </a:pPr>
-            <a:r>
-              <a:t>4. Follow implementation and evidence</a:t>
-            </a:r>
-          </a:p>
-        </p:txBody>
-      </p:sp>
-      <p:sp>
-        <p:nvSpPr>
-          <p:cNvPr id="3" name="Rectangle 2"/>
-          <p:cNvSpPr/>
-          <p:nvPr/>
-        </p:nvSpPr>
-        <p:spPr>
-          <a:xfrm>
-            <a:off x="0" y="6656832"/>
-            <a:ext cx="12191695" cy="201168"/>
-          </a:xfrm>
-          <a:prstGeom prst="rect">
-            <a:avLst/>
-          </a:prstGeom>
-          <a:solidFill>
-            <a:srgbClr val="0078D4"/>
-          </a:solidFill>
-          <a:ln>
-            <a:noFill/>
-          </a:ln>
-        </p:spPr>
-        <p:style>
-          <a:lnRef idx="1">
-            <a:schemeClr val="accent1"/>
-          </a:lnRef>
-          <a:fillRef idx="3">
-            <a:schemeClr val="accent1"/>
-          </a:fillRef>
-          <a:effectRef idx="2">
-            <a:schemeClr val="accent1"/>
-          </a:effectRef>
-          <a:fontRef idx="minor">
-            <a:schemeClr val="lt1"/>
-          </a:fontRef>
-        </p:style>
-        <p:txBody>
-          <a:bodyPr rtlCol="0" anchor="ctr"/>
-          <a:lstStyle/>
-          <a:p>
-            <a:pPr algn="ctr"/>
-          </a:p>
-        </p:txBody>
-      </p:sp>
-      <p:sp>
-        <p:nvSpPr>
-          <p:cNvPr id="4" name="TextBox 3"/>
-          <p:cNvSpPr txBox="1"/>
-          <p:nvPr/>
-        </p:nvSpPr>
-        <p:spPr>
-          <a:xfrm>
-            <a:off x="11521440" y="6419088"/>
-            <a:ext cx="365760" cy="228600"/>
-          </a:xfrm>
-          <a:prstGeom prst="rect">
-            <a:avLst/>
-          </a:prstGeom>
-          <a:noFill/>
-        </p:spPr>
-        <p:txBody>
-          <a:bodyPr wrap="none">
-            <a:spAutoFit/>
-          </a:bodyPr>
-          <a:lstStyle/>
-          <a:p>
-            <a:pPr algn="r">
-              <a:defRPr sz="1000">
-                <a:solidFill>
-                  <a:srgbClr val="5A6777"/>
-                </a:solidFill>
-              </a:defRPr>
-            </a:pPr>
-            <a:r>
-              <a:t>6</a:t>
-            </a:r>
-          </a:p>
-        </p:txBody>
-      </p:sp>
-      <p:sp>
-        <p:nvSpPr>
-          <p:cNvPr id="5" name="Rounded Rectangle 4"/>
-          <p:cNvSpPr/>
-          <p:nvPr/>
-        </p:nvSpPr>
-        <p:spPr>
-          <a:xfrm>
-            <a:off x="594360" y="1965960"/>
-            <a:ext cx="1457814" cy="960120"/>
-          </a:xfrm>
-          <a:prstGeom prst="roundRect">
-            <a:avLst/>
-          </a:prstGeom>
-          <a:solidFill>
-            <a:srgbClr val="0078D4"/>
-          </a:solidFill>
-          <a:ln>
-            <a:noFill/>
-          </a:ln>
-        </p:spPr>
-        <p:style>
-          <a:lnRef idx="1">
-            <a:schemeClr val="accent1"/>
-          </a:lnRef>
-          <a:fillRef idx="3">
-            <a:schemeClr val="accent1"/>
-          </a:fillRef>
-          <a:effectRef idx="2">
-            <a:schemeClr val="accent1"/>
-          </a:effectRef>
-          <a:fontRef idx="minor">
-            <a:schemeClr val="lt1"/>
-          </a:fontRef>
-        </p:style>
-        <p:txBody>
-          <a:bodyPr rtlCol="0" anchor="ctr"/>
-          <a:lstStyle/>
-          <a:p>
-            <a:pPr algn="ctr">
-              <a:defRPr sz="1400" b="1">
-                <a:solidFill>
-                  <a:srgbClr val="FFFFFF"/>
-                </a:solidFill>
-                <a:latin typeface="Aptos"/>
-              </a:defRPr>
-            </a:pPr>
-            <a:r>
-              <a:t>Knowledge</a:t>
-            </a:r>
-          </a:p>
-        </p:txBody>
-      </p:sp>
-      <p:sp>
-        <p:nvSpPr>
-          <p:cNvPr id="6" name="TextBox 5"/>
-          <p:cNvSpPr txBox="1"/>
-          <p:nvPr/>
-        </p:nvSpPr>
-        <p:spPr>
-          <a:xfrm>
-            <a:off x="2033886" y="2258568"/>
-            <a:ext cx="173736" cy="320040"/>
-          </a:xfrm>
-          <a:prstGeom prst="rect">
-            <a:avLst/>
-          </a:prstGeom>
-          <a:noFill/>
-        </p:spPr>
-        <p:txBody>
-          <a:bodyPr wrap="none">
-            <a:spAutoFit/>
-          </a:bodyPr>
-          <a:lstStyle/>
-          <a:p>
-            <a:pPr algn="ctr">
-              <a:defRPr b="1">
-                <a:solidFill>
-                  <a:srgbClr val="5A6777"/>
-                </a:solidFill>
-              </a:defRPr>
-            </a:pPr>
-            <a:r>
-              <a:t>&gt;</a:t>
-            </a:r>
-          </a:p>
-        </p:txBody>
-      </p:sp>
-      <p:sp>
-        <p:nvSpPr>
-          <p:cNvPr id="7" name="Rounded Rectangle 6"/>
-          <p:cNvSpPr/>
-          <p:nvPr/>
-        </p:nvSpPr>
-        <p:spPr>
-          <a:xfrm>
-            <a:off x="2180190" y="1965960"/>
-            <a:ext cx="1457814" cy="960120"/>
-          </a:xfrm>
-          <a:prstGeom prst="roundRect">
-            <a:avLst/>
-          </a:prstGeom>
-          <a:solidFill>
-            <a:srgbClr val="009999"/>
-          </a:solidFill>
-          <a:ln>
-            <a:noFill/>
-          </a:ln>
-        </p:spPr>
-        <p:style>
-          <a:lnRef idx="1">
-            <a:schemeClr val="accent1"/>
-          </a:lnRef>
-          <a:fillRef idx="3">
-            <a:schemeClr val="accent1"/>
-          </a:fillRef>
-          <a:effectRef idx="2">
-            <a:schemeClr val="accent1"/>
-          </a:effectRef>
-          <a:fontRef idx="minor">
-            <a:schemeClr val="lt1"/>
-          </a:fontRef>
-        </p:style>
-        <p:txBody>
-          <a:bodyPr rtlCol="0" anchor="ctr"/>
-          <a:lstStyle/>
-          <a:p>
-            <a:pPr algn="ctr">
-              <a:defRPr sz="1400" b="1">
-                <a:solidFill>
-                  <a:srgbClr val="FFFFFF"/>
-                </a:solidFill>
-                <a:latin typeface="Aptos"/>
-              </a:defRPr>
-            </a:pPr>
-            <a:r>
-              <a:t>Branch</a:t>
-            </a:r>
-          </a:p>
-        </p:txBody>
-      </p:sp>
-      <p:sp>
-        <p:nvSpPr>
-          <p:cNvPr id="8" name="TextBox 7"/>
-          <p:cNvSpPr txBox="1"/>
-          <p:nvPr/>
-        </p:nvSpPr>
-        <p:spPr>
-          <a:xfrm>
-            <a:off x="3619717" y="2258568"/>
-            <a:ext cx="173736" cy="320040"/>
-          </a:xfrm>
-          <a:prstGeom prst="rect">
-            <a:avLst/>
-          </a:prstGeom>
-          <a:noFill/>
-        </p:spPr>
-        <p:txBody>
-          <a:bodyPr wrap="none">
-            <a:spAutoFit/>
-          </a:bodyPr>
-          <a:lstStyle/>
-          <a:p>
-            <a:pPr algn="ctr">
-              <a:defRPr b="1">
-                <a:solidFill>
-                  <a:srgbClr val="5A6777"/>
-                </a:solidFill>
-              </a:defRPr>
-            </a:pPr>
-            <a:r>
-              <a:t>&gt;</a:t>
-            </a:r>
-          </a:p>
-        </p:txBody>
-      </p:sp>
-      <p:sp>
-        <p:nvSpPr>
-          <p:cNvPr id="9" name="Rounded Rectangle 8"/>
-          <p:cNvSpPr/>
-          <p:nvPr/>
-        </p:nvSpPr>
-        <p:spPr>
-          <a:xfrm>
-            <a:off x="3766021" y="1965960"/>
-            <a:ext cx="1457814" cy="960120"/>
-          </a:xfrm>
-          <a:prstGeom prst="roundRect">
-            <a:avLst/>
-          </a:prstGeom>
-          <a:solidFill>
-            <a:srgbClr val="107C41"/>
-          </a:solidFill>
-          <a:ln>
-            <a:noFill/>
-          </a:ln>
-        </p:spPr>
-        <p:style>
-          <a:lnRef idx="1">
-            <a:schemeClr val="accent1"/>
-          </a:lnRef>
-          <a:fillRef idx="3">
-            <a:schemeClr val="accent1"/>
-          </a:fillRef>
-          <a:effectRef idx="2">
-            <a:schemeClr val="accent1"/>
-          </a:effectRef>
-          <a:fontRef idx="minor">
-            <a:schemeClr val="lt1"/>
-          </a:fontRef>
-        </p:style>
-        <p:txBody>
-          <a:bodyPr rtlCol="0" anchor="ctr"/>
-          <a:lstStyle/>
-          <a:p>
-            <a:pPr algn="ctr">
-              <a:defRPr sz="1400" b="1">
-                <a:solidFill>
-                  <a:srgbClr val="FFFFFF"/>
-                </a:solidFill>
-                <a:latin typeface="Aptos"/>
-              </a:defRPr>
-            </a:pPr>
-            <a:r>
-              <a:t>Code + tests</a:t>
+              <a:t>Before presenting</a:t>
             </a:r>
           </a:p>
         </p:txBody>
@@ -5586,360 +5731,8 @@
         </p:nvSpPr>
         <p:spPr>
           <a:xfrm>
-            <a:off x="5205548" y="2258568"/>
-            <a:ext cx="173736" cy="320040"/>
-          </a:xfrm>
-          <a:prstGeom prst="rect">
-            <a:avLst/>
-          </a:prstGeom>
-          <a:noFill/>
-        </p:spPr>
-        <p:txBody>
-          <a:bodyPr wrap="none">
-            <a:spAutoFit/>
-          </a:bodyPr>
-          <a:lstStyle/>
-          <a:p>
-            <a:pPr algn="ctr">
-              <a:defRPr b="1">
-                <a:solidFill>
-                  <a:srgbClr val="5A6777"/>
-                </a:solidFill>
-              </a:defRPr>
-            </a:pPr>
-            <a:r>
-              <a:t>&gt;</a:t>
-            </a:r>
-          </a:p>
-        </p:txBody>
-      </p:sp>
-      <p:sp>
-        <p:nvSpPr>
-          <p:cNvPr id="11" name="Rounded Rectangle 10"/>
-          <p:cNvSpPr/>
-          <p:nvPr/>
-        </p:nvSpPr>
-        <p:spPr>
-          <a:xfrm>
-            <a:off x="5351852" y="1965960"/>
-            <a:ext cx="1457814" cy="960120"/>
-          </a:xfrm>
-          <a:prstGeom prst="roundRect">
-            <a:avLst/>
-          </a:prstGeom>
-          <a:solidFill>
-            <a:srgbClr val="CA5010"/>
-          </a:solidFill>
-          <a:ln>
-            <a:noFill/>
-          </a:ln>
-        </p:spPr>
-        <p:style>
-          <a:lnRef idx="1">
-            <a:schemeClr val="accent1"/>
-          </a:lnRef>
-          <a:fillRef idx="3">
-            <a:schemeClr val="accent1"/>
-          </a:fillRef>
-          <a:effectRef idx="2">
-            <a:schemeClr val="accent1"/>
-          </a:effectRef>
-          <a:fontRef idx="minor">
-            <a:schemeClr val="lt1"/>
-          </a:fontRef>
-        </p:style>
-        <p:txBody>
-          <a:bodyPr rtlCol="0" anchor="ctr"/>
-          <a:lstStyle/>
-          <a:p>
-            <a:pPr algn="ctr">
-              <a:defRPr sz="1400" b="1">
-                <a:solidFill>
-                  <a:srgbClr val="FFFFFF"/>
-                </a:solidFill>
-                <a:latin typeface="Aptos"/>
-              </a:defRPr>
-            </a:pPr>
-            <a:r>
-              <a:t>Pull request</a:t>
-            </a:r>
-          </a:p>
-        </p:txBody>
-      </p:sp>
-      <p:sp>
-        <p:nvSpPr>
-          <p:cNvPr id="12" name="TextBox 11"/>
-          <p:cNvSpPr txBox="1"/>
-          <p:nvPr/>
-        </p:nvSpPr>
-        <p:spPr>
-          <a:xfrm>
-            <a:off x="6791379" y="2258568"/>
-            <a:ext cx="173736" cy="320040"/>
-          </a:xfrm>
-          <a:prstGeom prst="rect">
-            <a:avLst/>
-          </a:prstGeom>
-          <a:noFill/>
-        </p:spPr>
-        <p:txBody>
-          <a:bodyPr wrap="none">
-            <a:spAutoFit/>
-          </a:bodyPr>
-          <a:lstStyle/>
-          <a:p>
-            <a:pPr algn="ctr">
-              <a:defRPr b="1">
-                <a:solidFill>
-                  <a:srgbClr val="5A6777"/>
-                </a:solidFill>
-              </a:defRPr>
-            </a:pPr>
-            <a:r>
-              <a:t>&gt;</a:t>
-            </a:r>
-          </a:p>
-        </p:txBody>
-      </p:sp>
-      <p:sp>
-        <p:nvSpPr>
-          <p:cNvPr id="13" name="Rounded Rectangle 12"/>
-          <p:cNvSpPr/>
-          <p:nvPr/>
-        </p:nvSpPr>
-        <p:spPr>
-          <a:xfrm>
-            <a:off x="6937683" y="1965960"/>
-            <a:ext cx="1457814" cy="960120"/>
-          </a:xfrm>
-          <a:prstGeom prst="roundRect">
-            <a:avLst/>
-          </a:prstGeom>
-          <a:solidFill>
-            <a:srgbClr val="0078D4"/>
-          </a:solidFill>
-          <a:ln>
-            <a:noFill/>
-          </a:ln>
-        </p:spPr>
-        <p:style>
-          <a:lnRef idx="1">
-            <a:schemeClr val="accent1"/>
-          </a:lnRef>
-          <a:fillRef idx="3">
-            <a:schemeClr val="accent1"/>
-          </a:fillRef>
-          <a:effectRef idx="2">
-            <a:schemeClr val="accent1"/>
-          </a:effectRef>
-          <a:fontRef idx="minor">
-            <a:schemeClr val="lt1"/>
-          </a:fontRef>
-        </p:style>
-        <p:txBody>
-          <a:bodyPr rtlCol="0" anchor="ctr"/>
-          <a:lstStyle/>
-          <a:p>
-            <a:pPr algn="ctr">
-              <a:defRPr sz="1400" b="1">
-                <a:solidFill>
-                  <a:srgbClr val="FFFFFF"/>
-                </a:solidFill>
-                <a:latin typeface="Aptos"/>
-              </a:defRPr>
-            </a:pPr>
-            <a:r>
-              <a:t>CI</a:t>
-            </a:r>
-          </a:p>
-        </p:txBody>
-      </p:sp>
-      <p:sp>
-        <p:nvSpPr>
-          <p:cNvPr id="14" name="TextBox 13"/>
-          <p:cNvSpPr txBox="1"/>
-          <p:nvPr/>
-        </p:nvSpPr>
-        <p:spPr>
-          <a:xfrm>
-            <a:off x="8377210" y="2258568"/>
-            <a:ext cx="173736" cy="320040"/>
-          </a:xfrm>
-          <a:prstGeom prst="rect">
-            <a:avLst/>
-          </a:prstGeom>
-          <a:noFill/>
-        </p:spPr>
-        <p:txBody>
-          <a:bodyPr wrap="none">
-            <a:spAutoFit/>
-          </a:bodyPr>
-          <a:lstStyle/>
-          <a:p>
-            <a:pPr algn="ctr">
-              <a:defRPr b="1">
-                <a:solidFill>
-                  <a:srgbClr val="5A6777"/>
-                </a:solidFill>
-              </a:defRPr>
-            </a:pPr>
-            <a:r>
-              <a:t>&gt;</a:t>
-            </a:r>
-          </a:p>
-        </p:txBody>
-      </p:sp>
-      <p:sp>
-        <p:nvSpPr>
-          <p:cNvPr id="15" name="Rounded Rectangle 14"/>
-          <p:cNvSpPr/>
-          <p:nvPr/>
-        </p:nvSpPr>
-        <p:spPr>
-          <a:xfrm>
-            <a:off x="8523514" y="1965960"/>
-            <a:ext cx="1457814" cy="960120"/>
-          </a:xfrm>
-          <a:prstGeom prst="roundRect">
-            <a:avLst/>
-          </a:prstGeom>
-          <a:solidFill>
-            <a:srgbClr val="009999"/>
-          </a:solidFill>
-          <a:ln>
-            <a:noFill/>
-          </a:ln>
-        </p:spPr>
-        <p:style>
-          <a:lnRef idx="1">
-            <a:schemeClr val="accent1"/>
-          </a:lnRef>
-          <a:fillRef idx="3">
-            <a:schemeClr val="accent1"/>
-          </a:fillRef>
-          <a:effectRef idx="2">
-            <a:schemeClr val="accent1"/>
-          </a:effectRef>
-          <a:fontRef idx="minor">
-            <a:schemeClr val="lt1"/>
-          </a:fontRef>
-        </p:style>
-        <p:txBody>
-          <a:bodyPr rtlCol="0" anchor="ctr"/>
-          <a:lstStyle/>
-          <a:p>
-            <a:pPr algn="ctr">
-              <a:defRPr sz="1400" b="1">
-                <a:solidFill>
-                  <a:srgbClr val="FFFFFF"/>
-                </a:solidFill>
-                <a:latin typeface="Aptos"/>
-              </a:defRPr>
-            </a:pPr>
-            <a:r>
-              <a:t>Review</a:t>
-            </a:r>
-          </a:p>
-        </p:txBody>
-      </p:sp>
-      <p:sp>
-        <p:nvSpPr>
-          <p:cNvPr id="16" name="TextBox 15"/>
-          <p:cNvSpPr txBox="1"/>
-          <p:nvPr/>
-        </p:nvSpPr>
-        <p:spPr>
-          <a:xfrm>
-            <a:off x="9963041" y="2258568"/>
-            <a:ext cx="173736" cy="320040"/>
-          </a:xfrm>
-          <a:prstGeom prst="rect">
-            <a:avLst/>
-          </a:prstGeom>
-          <a:noFill/>
-        </p:spPr>
-        <p:txBody>
-          <a:bodyPr wrap="none">
-            <a:spAutoFit/>
-          </a:bodyPr>
-          <a:lstStyle/>
-          <a:p>
-            <a:pPr algn="ctr">
-              <a:defRPr b="1">
-                <a:solidFill>
-                  <a:srgbClr val="5A6777"/>
-                </a:solidFill>
-              </a:defRPr>
-            </a:pPr>
-            <a:r>
-              <a:t>&gt;</a:t>
-            </a:r>
-          </a:p>
-        </p:txBody>
-      </p:sp>
-      <p:sp>
-        <p:nvSpPr>
-          <p:cNvPr id="17" name="Rounded Rectangle 16"/>
-          <p:cNvSpPr/>
-          <p:nvPr/>
-        </p:nvSpPr>
-        <p:spPr>
-          <a:xfrm>
-            <a:off x="10109345" y="1965960"/>
-            <a:ext cx="1457814" cy="960120"/>
-          </a:xfrm>
-          <a:prstGeom prst="roundRect">
-            <a:avLst/>
-          </a:prstGeom>
-          <a:solidFill>
-            <a:srgbClr val="107C41"/>
-          </a:solidFill>
-          <a:ln>
-            <a:noFill/>
-          </a:ln>
-        </p:spPr>
-        <p:style>
-          <a:lnRef idx="1">
-            <a:schemeClr val="accent1"/>
-          </a:lnRef>
-          <a:fillRef idx="3">
-            <a:schemeClr val="accent1"/>
-          </a:fillRef>
-          <a:effectRef idx="2">
-            <a:schemeClr val="accent1"/>
-          </a:effectRef>
-          <a:fontRef idx="minor">
-            <a:schemeClr val="lt1"/>
-          </a:fontRef>
-        </p:style>
-        <p:txBody>
-          <a:bodyPr rtlCol="0" anchor="ctr"/>
-          <a:lstStyle/>
-          <a:p>
-            <a:pPr algn="ctr">
-              <a:defRPr sz="1400" b="1">
-                <a:solidFill>
-                  <a:srgbClr val="FFFFFF"/>
-                </a:solidFill>
-                <a:latin typeface="Aptos"/>
-              </a:defRPr>
-            </a:pPr>
-            <a:r>
-              <a:t>QA</a:t>
-            </a:r>
-          </a:p>
-        </p:txBody>
-      </p:sp>
-      <p:sp>
-        <p:nvSpPr>
-          <p:cNvPr id="18" name="TextBox 17"/>
-          <p:cNvSpPr txBox="1"/>
-          <p:nvPr/>
-        </p:nvSpPr>
-        <p:spPr>
-          <a:xfrm>
-            <a:off x="731520" y="3749039"/>
-            <a:ext cx="10789920" cy="1920240"/>
+            <a:off x="1005840" y="4983480"/>
+            <a:ext cx="10149840" cy="685800"/>
           </a:xfrm>
           <a:prstGeom prst="rect">
             <a:avLst/>
@@ -5953,1794 +5746,15 @@
           <a:lstStyle/>
           <a:p>
             <a:pPr>
-              <a:spcAft>
-                <a:spcPts val="1400"/>
-              </a:spcAft>
-              <a:defRPr sz="2300">
-                <a:solidFill>
-                  <a:srgbClr val="122038"/>
+              <a:defRPr sz="1800" b="0">
+                <a:solidFill>
+                  <a:srgbClr val="164A61"/>
                 </a:solidFill>
                 <a:latin typeface="Aptos"/>
               </a:defRPr>
             </a:pPr>
             <a:r>
-              <a:t>•  Every claim must be grounded in repository knowledge or explicit evidence.</a:t>
-            </a:r>
-          </a:p>
-          <a:p>
-            <a:pPr>
-              <a:spcAft>
-                <a:spcPts val="1400"/>
-              </a:spcAft>
-              <a:defRPr sz="2300">
-                <a:solidFill>
-                  <a:srgbClr val="122038"/>
-                </a:solidFill>
-                <a:latin typeface="Aptos"/>
-              </a:defRPr>
-            </a:pPr>
-            <a:r>
-              <a:t>•  Source or PR metadata changes require fresh validation, review, and QA.</a:t>
-            </a:r>
-          </a:p>
-          <a:p>
-            <a:pPr>
-              <a:spcAft>
-                <a:spcPts val="1400"/>
-              </a:spcAft>
-              <a:defRPr sz="2300">
-                <a:solidFill>
-                  <a:srgbClr val="122038"/>
-                </a:solidFill>
-                <a:latin typeface="Aptos"/>
-              </a:defRPr>
-            </a:pPr>
-            <a:r>
-              <a:t>•  The QA agent verifies acceptance criteria and negative paths independently.</a:t>
-            </a:r>
-          </a:p>
-        </p:txBody>
-      </p:sp>
-    </p:spTree>
-  </p:cSld>
-  <p:clrMapOvr>
-    <a:masterClrMapping/>
-  </p:clrMapOvr>
-</p:sld>
-</file>
-
-<file path=ppt/slides/slide7.xml><?xml version="1.0" encoding="utf-8"?>
-<p:sld xmlns:a="http://schemas.openxmlformats.org/drawingml/2006/main" xmlns:p="http://schemas.openxmlformats.org/presentationml/2006/main" xmlns:r="http://schemas.openxmlformats.org/officeDocument/2006/relationships">
-  <p:cSld>
-    <p:bg>
-      <p:bgPr>
-        <a:solidFill>
-          <a:srgbClr val="FFFFFF"/>
-        </a:solidFill>
-        <a:effectLst/>
-      </p:bgPr>
-    </p:bg>
-    <p:spTree>
-      <p:nvGrpSpPr>
-        <p:cNvPr id="1" name=""/>
-        <p:cNvGrpSpPr/>
-        <p:nvPr/>
-      </p:nvGrpSpPr>
-      <p:grpSpPr/>
-      <p:sp>
-        <p:nvSpPr>
-          <p:cNvPr id="2" name="TextBox 1"/>
-          <p:cNvSpPr txBox="1"/>
-          <p:nvPr/>
-        </p:nvSpPr>
-        <p:spPr>
-          <a:xfrm>
-            <a:off x="594360" y="320040"/>
-            <a:ext cx="10972800" cy="640080"/>
-          </a:xfrm>
-          <a:prstGeom prst="rect">
-            <a:avLst/>
-          </a:prstGeom>
-          <a:noFill/>
-        </p:spPr>
-        <p:txBody>
-          <a:bodyPr wrap="none">
-            <a:spAutoFit/>
-          </a:bodyPr>
-          <a:lstStyle/>
-          <a:p>
-            <a:pPr>
-              <a:defRPr sz="3000" b="1">
-                <a:solidFill>
-                  <a:srgbClr val="122038"/>
-                </a:solidFill>
-                <a:latin typeface="Aptos Display"/>
-              </a:defRPr>
-            </a:pPr>
-            <a:r>
-              <a:t>5. Approve and deploy</a:t>
-            </a:r>
-          </a:p>
-        </p:txBody>
-      </p:sp>
-      <p:sp>
-        <p:nvSpPr>
-          <p:cNvPr id="3" name="Rectangle 2"/>
-          <p:cNvSpPr/>
-          <p:nvPr/>
-        </p:nvSpPr>
-        <p:spPr>
-          <a:xfrm>
-            <a:off x="0" y="6656832"/>
-            <a:ext cx="12191695" cy="201168"/>
-          </a:xfrm>
-          <a:prstGeom prst="rect">
-            <a:avLst/>
-          </a:prstGeom>
-          <a:solidFill>
-            <a:srgbClr val="0078D4"/>
-          </a:solidFill>
-          <a:ln>
-            <a:noFill/>
-          </a:ln>
-        </p:spPr>
-        <p:style>
-          <a:lnRef idx="1">
-            <a:schemeClr val="accent1"/>
-          </a:lnRef>
-          <a:fillRef idx="3">
-            <a:schemeClr val="accent1"/>
-          </a:fillRef>
-          <a:effectRef idx="2">
-            <a:schemeClr val="accent1"/>
-          </a:effectRef>
-          <a:fontRef idx="minor">
-            <a:schemeClr val="lt1"/>
-          </a:fontRef>
-        </p:style>
-        <p:txBody>
-          <a:bodyPr rtlCol="0" anchor="ctr"/>
-          <a:lstStyle/>
-          <a:p>
-            <a:pPr algn="ctr"/>
-          </a:p>
-        </p:txBody>
-      </p:sp>
-      <p:sp>
-        <p:nvSpPr>
-          <p:cNvPr id="4" name="TextBox 3"/>
-          <p:cNvSpPr txBox="1"/>
-          <p:nvPr/>
-        </p:nvSpPr>
-        <p:spPr>
-          <a:xfrm>
-            <a:off x="11521440" y="6419088"/>
-            <a:ext cx="365760" cy="228600"/>
-          </a:xfrm>
-          <a:prstGeom prst="rect">
-            <a:avLst/>
-          </a:prstGeom>
-          <a:noFill/>
-        </p:spPr>
-        <p:txBody>
-          <a:bodyPr wrap="none">
-            <a:spAutoFit/>
-          </a:bodyPr>
-          <a:lstStyle/>
-          <a:p>
-            <a:pPr algn="r">
-              <a:defRPr sz="1000">
-                <a:solidFill>
-                  <a:srgbClr val="5A6777"/>
-                </a:solidFill>
-              </a:defRPr>
-            </a:pPr>
-            <a:r>
-              <a:t>7</a:t>
-            </a:r>
-          </a:p>
-        </p:txBody>
-      </p:sp>
-      <p:sp>
-        <p:nvSpPr>
-          <p:cNvPr id="5" name="TextBox 4"/>
-          <p:cNvSpPr txBox="1"/>
-          <p:nvPr/>
-        </p:nvSpPr>
-        <p:spPr>
-          <a:xfrm>
-            <a:off x="731520" y="1508760"/>
-            <a:ext cx="10789920" cy="4480560"/>
-          </a:xfrm>
-          <a:prstGeom prst="rect">
-            <a:avLst/>
-          </a:prstGeom>
-          <a:noFill/>
-        </p:spPr>
-        <p:txBody>
-          <a:bodyPr wrap="square">
-            <a:spAutoFit/>
-          </a:bodyPr>
-          <a:lstStyle/>
-          <a:p>
-            <a:pPr>
-              <a:spcAft>
-                <a:spcPts val="1400"/>
-              </a:spcAft>
-              <a:defRPr sz="2300">
-                <a:solidFill>
-                  <a:srgbClr val="122038"/>
-                </a:solidFill>
-                <a:latin typeface="Aptos"/>
-              </a:defRPr>
-            </a:pPr>
-            <a:r>
-              <a:t>•  Review the exact pull-request revision and resolve all findings.</a:t>
-            </a:r>
-          </a:p>
-          <a:p>
-            <a:pPr>
-              <a:spcAft>
-                <a:spcPts val="1400"/>
-              </a:spcAft>
-              <a:defRPr sz="2300">
-                <a:solidFill>
-                  <a:srgbClr val="122038"/>
-                </a:solidFill>
-                <a:latin typeface="Aptos"/>
-              </a:defRPr>
-            </a:pPr>
-            <a:r>
-              <a:t>•  Confirm CI and immutable QA evidence bind to the same source.</a:t>
-            </a:r>
-          </a:p>
-          <a:p>
-            <a:pPr>
-              <a:spcAft>
-                <a:spcPts val="1400"/>
-              </a:spcAft>
-              <a:defRPr sz="2300">
-                <a:solidFill>
-                  <a:srgbClr val="122038"/>
-                </a:solidFill>
-                <a:latin typeface="Aptos"/>
-              </a:defRPr>
-            </a:pPr>
-            <a:r>
-              <a:t>•  A human approves merge and release; bot recommendations are not approval.</a:t>
-            </a:r>
-          </a:p>
-          <a:p>
-            <a:pPr>
-              <a:spcAft>
-                <a:spcPts val="1400"/>
-              </a:spcAft>
-              <a:defRPr sz="2300">
-                <a:solidFill>
-                  <a:srgbClr val="122038"/>
-                </a:solidFill>
-                <a:latin typeface="Aptos"/>
-              </a:defRPr>
-            </a:pPr>
-            <a:r>
-              <a:t>•  Development deploys automatically after merge.</a:t>
-            </a:r>
-          </a:p>
-          <a:p>
-            <a:pPr>
-              <a:spcAft>
-                <a:spcPts val="1400"/>
-              </a:spcAft>
-              <a:defRPr sz="2300">
-                <a:solidFill>
-                  <a:srgbClr val="122038"/>
-                </a:solidFill>
-                <a:latin typeface="Aptos"/>
-              </a:defRPr>
-            </a:pPr>
-            <a:r>
-              <a:t>•  Production remains manual and protected.</a:t>
-            </a:r>
-          </a:p>
-        </p:txBody>
-      </p:sp>
-    </p:spTree>
-  </p:cSld>
-  <p:clrMapOvr>
-    <a:masterClrMapping/>
-  </p:clrMapOvr>
-</p:sld>
-</file>
-
-<file path=ppt/slides/slide8.xml><?xml version="1.0" encoding="utf-8"?>
-<p:sld xmlns:a="http://schemas.openxmlformats.org/drawingml/2006/main" xmlns:p="http://schemas.openxmlformats.org/presentationml/2006/main" xmlns:r="http://schemas.openxmlformats.org/officeDocument/2006/relationships">
-  <p:cSld>
-    <p:bg>
-      <p:bgPr>
-        <a:solidFill>
-          <a:srgbClr val="FFFFFF"/>
-        </a:solidFill>
-        <a:effectLst/>
-      </p:bgPr>
-    </p:bg>
-    <p:spTree>
-      <p:nvGrpSpPr>
-        <p:cNvPr id="1" name=""/>
-        <p:cNvGrpSpPr/>
-        <p:nvPr/>
-      </p:nvGrpSpPr>
-      <p:grpSpPr/>
-      <p:sp>
-        <p:nvSpPr>
-          <p:cNvPr id="2" name="TextBox 1"/>
-          <p:cNvSpPr txBox="1"/>
-          <p:nvPr/>
-        </p:nvSpPr>
-        <p:spPr>
-          <a:xfrm>
-            <a:off x="594360" y="320040"/>
-            <a:ext cx="10972800" cy="640080"/>
-          </a:xfrm>
-          <a:prstGeom prst="rect">
-            <a:avLst/>
-          </a:prstGeom>
-          <a:noFill/>
-        </p:spPr>
-        <p:txBody>
-          <a:bodyPr wrap="none">
-            <a:spAutoFit/>
-          </a:bodyPr>
-          <a:lstStyle/>
-          <a:p>
-            <a:pPr>
-              <a:defRPr sz="3000" b="1">
-                <a:solidFill>
-                  <a:srgbClr val="122038"/>
-                </a:solidFill>
-                <a:latin typeface="Aptos Display"/>
-              </a:defRPr>
-            </a:pPr>
-            <a:r>
-              <a:t>Possible demo results</a:t>
-            </a:r>
-          </a:p>
-        </p:txBody>
-      </p:sp>
-      <p:sp>
-        <p:nvSpPr>
-          <p:cNvPr id="3" name="TextBox 2"/>
-          <p:cNvSpPr txBox="1"/>
-          <p:nvPr/>
-        </p:nvSpPr>
-        <p:spPr>
-          <a:xfrm>
-            <a:off x="621792" y="932688"/>
-            <a:ext cx="10789920" cy="411480"/>
-          </a:xfrm>
-          <a:prstGeom prst="rect">
-            <a:avLst/>
-          </a:prstGeom>
-          <a:noFill/>
-        </p:spPr>
-        <p:txBody>
-          <a:bodyPr wrap="none">
-            <a:spAutoFit/>
-          </a:bodyPr>
-          <a:lstStyle/>
-          <a:p>
-            <a:pPr>
-              <a:defRPr sz="1400">
-                <a:solidFill>
-                  <a:srgbClr val="5A6777"/>
-                </a:solidFill>
-                <a:latin typeface="Aptos"/>
-              </a:defRPr>
-            </a:pPr>
-            <a:r>
-              <a:t>Show the outcome honestly</a:t>
-            </a:r>
-          </a:p>
-        </p:txBody>
-      </p:sp>
-      <p:sp>
-        <p:nvSpPr>
-          <p:cNvPr id="4" name="Rectangle 3"/>
-          <p:cNvSpPr/>
-          <p:nvPr/>
-        </p:nvSpPr>
-        <p:spPr>
-          <a:xfrm>
-            <a:off x="0" y="6656832"/>
-            <a:ext cx="12191695" cy="201168"/>
-          </a:xfrm>
-          <a:prstGeom prst="rect">
-            <a:avLst/>
-          </a:prstGeom>
-          <a:solidFill>
-            <a:srgbClr val="0078D4"/>
-          </a:solidFill>
-          <a:ln>
-            <a:noFill/>
-          </a:ln>
-        </p:spPr>
-        <p:style>
-          <a:lnRef idx="1">
-            <a:schemeClr val="accent1"/>
-          </a:lnRef>
-          <a:fillRef idx="3">
-            <a:schemeClr val="accent1"/>
-          </a:fillRef>
-          <a:effectRef idx="2">
-            <a:schemeClr val="accent1"/>
-          </a:effectRef>
-          <a:fontRef idx="minor">
-            <a:schemeClr val="lt1"/>
-          </a:fontRef>
-        </p:style>
-        <p:txBody>
-          <a:bodyPr rtlCol="0" anchor="ctr"/>
-          <a:lstStyle/>
-          <a:p>
-            <a:pPr algn="ctr"/>
-          </a:p>
-        </p:txBody>
-      </p:sp>
-      <p:sp>
-        <p:nvSpPr>
-          <p:cNvPr id="5" name="TextBox 4"/>
-          <p:cNvSpPr txBox="1"/>
-          <p:nvPr/>
-        </p:nvSpPr>
-        <p:spPr>
-          <a:xfrm>
-            <a:off x="11521440" y="6419088"/>
-            <a:ext cx="365760" cy="228600"/>
-          </a:xfrm>
-          <a:prstGeom prst="rect">
-            <a:avLst/>
-          </a:prstGeom>
-          <a:noFill/>
-        </p:spPr>
-        <p:txBody>
-          <a:bodyPr wrap="none">
-            <a:spAutoFit/>
-          </a:bodyPr>
-          <a:lstStyle/>
-          <a:p>
-            <a:pPr algn="r">
-              <a:defRPr sz="1000">
-                <a:solidFill>
-                  <a:srgbClr val="5A6777"/>
-                </a:solidFill>
-              </a:defRPr>
-            </a:pPr>
-            <a:r>
-              <a:t>8</a:t>
-            </a:r>
-          </a:p>
-        </p:txBody>
-      </p:sp>
-      <p:sp>
-        <p:nvSpPr>
-          <p:cNvPr id="6" name="Rounded Rectangle 5"/>
-          <p:cNvSpPr/>
-          <p:nvPr/>
-        </p:nvSpPr>
-        <p:spPr>
-          <a:xfrm>
-            <a:off x="594360" y="1554480"/>
-            <a:ext cx="3566160" cy="4114800"/>
-          </a:xfrm>
-          <a:prstGeom prst="roundRect">
-            <a:avLst/>
-          </a:prstGeom>
-          <a:solidFill>
-            <a:srgbClr val="F3F7FB"/>
-          </a:solidFill>
-          <a:ln w="25400">
-            <a:solidFill>
-              <a:srgbClr val="107C41"/>
-            </a:solidFill>
-          </a:ln>
-        </p:spPr>
-        <p:style>
-          <a:lnRef idx="1">
-            <a:schemeClr val="accent1"/>
-          </a:lnRef>
-          <a:fillRef idx="3">
-            <a:schemeClr val="accent1"/>
-          </a:fillRef>
-          <a:effectRef idx="2">
-            <a:schemeClr val="accent1"/>
-          </a:effectRef>
-          <a:fontRef idx="minor">
-            <a:schemeClr val="lt1"/>
-          </a:fontRef>
-        </p:style>
-        <p:txBody>
-          <a:bodyPr rtlCol="0" anchor="ctr"/>
-          <a:lstStyle/>
-          <a:p>
-            <a:pPr algn="ctr"/>
-          </a:p>
-        </p:txBody>
-      </p:sp>
-      <p:sp>
-        <p:nvSpPr>
-          <p:cNvPr id="7" name="TextBox 6"/>
-          <p:cNvSpPr txBox="1"/>
-          <p:nvPr/>
-        </p:nvSpPr>
-        <p:spPr>
-          <a:xfrm>
-            <a:off x="822960" y="1737360"/>
-            <a:ext cx="3108960" cy="411480"/>
-          </a:xfrm>
-          <a:prstGeom prst="rect">
-            <a:avLst/>
-          </a:prstGeom>
-          <a:noFill/>
-        </p:spPr>
-        <p:txBody>
-          <a:bodyPr wrap="none">
-            <a:spAutoFit/>
-          </a:bodyPr>
-          <a:lstStyle/>
-          <a:p>
-            <a:pPr>
-              <a:defRPr sz="1800" b="1">
-                <a:solidFill>
-                  <a:srgbClr val="107C41"/>
-                </a:solidFill>
-                <a:latin typeface="Aptos Display"/>
-              </a:defRPr>
-            </a:pPr>
-            <a:r>
-              <a:t>Success</a:t>
-            </a:r>
-          </a:p>
-        </p:txBody>
-      </p:sp>
-      <p:sp>
-        <p:nvSpPr>
-          <p:cNvPr id="8" name="TextBox 7"/>
-          <p:cNvSpPr txBox="1"/>
-          <p:nvPr/>
-        </p:nvSpPr>
-        <p:spPr>
-          <a:xfrm>
-            <a:off x="822960" y="2212848"/>
-            <a:ext cx="3108960" cy="3291840"/>
-          </a:xfrm>
-          <a:prstGeom prst="rect">
-            <a:avLst/>
-          </a:prstGeom>
-          <a:noFill/>
-        </p:spPr>
-        <p:txBody>
-          <a:bodyPr wrap="none">
-            <a:spAutoFit/>
-          </a:bodyPr>
-          <a:lstStyle/>
-          <a:p>
-            <a:pPr>
-              <a:spcAft>
-                <a:spcPts val="400"/>
-              </a:spcAft>
-              <a:defRPr sz="1500">
-                <a:solidFill>
-                  <a:srgbClr val="122038"/>
-                </a:solidFill>
-                <a:latin typeface="Aptos"/>
-              </a:defRPr>
-            </a:pPr>
-            <a:r>
-              <a:t>Work item becomes Active.</a:t>
-            </a:r>
-            <a:br/>
-            <a:r>
-              <a:t>Issue and PR are linked.</a:t>
-            </a:r>
-            <a:br/>
-            <a:r>
-              <a:t>CI, review, and QA pass.</a:t>
-            </a:r>
-            <a:br/>
-            <a:r>
-              <a:t>Development deploys.</a:t>
-            </a:r>
-            <a:br/>
-            <a:r>
-              <a:t>Web/API behavior is verified.</a:t>
-            </a:r>
-          </a:p>
-        </p:txBody>
-      </p:sp>
-      <p:sp>
-        <p:nvSpPr>
-          <p:cNvPr id="9" name="Rounded Rectangle 8"/>
-          <p:cNvSpPr/>
-          <p:nvPr/>
-        </p:nvSpPr>
-        <p:spPr>
-          <a:xfrm>
-            <a:off x="4315968" y="1554480"/>
-            <a:ext cx="3566160" cy="4114800"/>
-          </a:xfrm>
-          <a:prstGeom prst="roundRect">
-            <a:avLst/>
-          </a:prstGeom>
-          <a:solidFill>
-            <a:srgbClr val="F3F7FB"/>
-          </a:solidFill>
-          <a:ln w="25400">
-            <a:solidFill>
-              <a:srgbClr val="CA5010"/>
-            </a:solidFill>
-          </a:ln>
-        </p:spPr>
-        <p:style>
-          <a:lnRef idx="1">
-            <a:schemeClr val="accent1"/>
-          </a:lnRef>
-          <a:fillRef idx="3">
-            <a:schemeClr val="accent1"/>
-          </a:fillRef>
-          <a:effectRef idx="2">
-            <a:schemeClr val="accent1"/>
-          </a:effectRef>
-          <a:fontRef idx="minor">
-            <a:schemeClr val="lt1"/>
-          </a:fontRef>
-        </p:style>
-        <p:txBody>
-          <a:bodyPr rtlCol="0" anchor="ctr"/>
-          <a:lstStyle/>
-          <a:p>
-            <a:pPr algn="ctr"/>
-          </a:p>
-        </p:txBody>
-      </p:sp>
-      <p:sp>
-        <p:nvSpPr>
-          <p:cNvPr id="10" name="TextBox 9"/>
-          <p:cNvSpPr txBox="1"/>
-          <p:nvPr/>
-        </p:nvSpPr>
-        <p:spPr>
-          <a:xfrm>
-            <a:off x="4544568" y="1737360"/>
-            <a:ext cx="3108960" cy="411480"/>
-          </a:xfrm>
-          <a:prstGeom prst="rect">
-            <a:avLst/>
-          </a:prstGeom>
-          <a:noFill/>
-        </p:spPr>
-        <p:txBody>
-          <a:bodyPr wrap="none">
-            <a:spAutoFit/>
-          </a:bodyPr>
-          <a:lstStyle/>
-          <a:p>
-            <a:pPr>
-              <a:defRPr sz="1800" b="1">
-                <a:solidFill>
-                  <a:srgbClr val="CA5010"/>
-                </a:solidFill>
-                <a:latin typeface="Aptos Display"/>
-              </a:defRPr>
-            </a:pPr>
-            <a:r>
-              <a:t>Needs correction</a:t>
-            </a:r>
-          </a:p>
-        </p:txBody>
-      </p:sp>
-      <p:sp>
-        <p:nvSpPr>
-          <p:cNvPr id="11" name="TextBox 10"/>
-          <p:cNvSpPr txBox="1"/>
-          <p:nvPr/>
-        </p:nvSpPr>
-        <p:spPr>
-          <a:xfrm>
-            <a:off x="4544568" y="2212848"/>
-            <a:ext cx="3108960" cy="3291840"/>
-          </a:xfrm>
-          <a:prstGeom prst="rect">
-            <a:avLst/>
-          </a:prstGeom>
-          <a:noFill/>
-        </p:spPr>
-        <p:txBody>
-          <a:bodyPr wrap="none">
-            <a:spAutoFit/>
-          </a:bodyPr>
-          <a:lstStyle/>
-          <a:p>
-            <a:pPr>
-              <a:spcAft>
-                <a:spcPts val="400"/>
-              </a:spcAft>
-              <a:defRPr sz="1500">
-                <a:solidFill>
-                  <a:srgbClr val="122038"/>
-                </a:solidFill>
-                <a:latin typeface="Aptos"/>
-              </a:defRPr>
-            </a:pPr>
-            <a:r>
-              <a:t>A gate finds a defect.</a:t>
-            </a:r>
-            <a:br/>
-            <a:r>
-              <a:t>Agent updates code or metadata.</a:t>
-            </a:r>
-            <a:br/>
-            <a:r>
-              <a:t>All affected evidence is regenerated.</a:t>
-            </a:r>
-            <a:br/>
-            <a:r>
-              <a:t>No stale result is reused.</a:t>
-            </a:r>
-          </a:p>
-        </p:txBody>
-      </p:sp>
-      <p:sp>
-        <p:nvSpPr>
-          <p:cNvPr id="12" name="Rounded Rectangle 11"/>
-          <p:cNvSpPr/>
-          <p:nvPr/>
-        </p:nvSpPr>
-        <p:spPr>
-          <a:xfrm>
-            <a:off x="8037575" y="1554480"/>
-            <a:ext cx="3566160" cy="4114800"/>
-          </a:xfrm>
-          <a:prstGeom prst="roundRect">
-            <a:avLst/>
-          </a:prstGeom>
-          <a:solidFill>
-            <a:srgbClr val="F3F7FB"/>
-          </a:solidFill>
-          <a:ln w="25400">
-            <a:solidFill>
-              <a:srgbClr val="C42B1C"/>
-            </a:solidFill>
-          </a:ln>
-        </p:spPr>
-        <p:style>
-          <a:lnRef idx="1">
-            <a:schemeClr val="accent1"/>
-          </a:lnRef>
-          <a:fillRef idx="3">
-            <a:schemeClr val="accent1"/>
-          </a:fillRef>
-          <a:effectRef idx="2">
-            <a:schemeClr val="accent1"/>
-          </a:effectRef>
-          <a:fontRef idx="minor">
-            <a:schemeClr val="lt1"/>
-          </a:fontRef>
-        </p:style>
-        <p:txBody>
-          <a:bodyPr rtlCol="0" anchor="ctr"/>
-          <a:lstStyle/>
-          <a:p>
-            <a:pPr algn="ctr"/>
-          </a:p>
-        </p:txBody>
-      </p:sp>
-      <p:sp>
-        <p:nvSpPr>
-          <p:cNvPr id="13" name="TextBox 12"/>
-          <p:cNvSpPr txBox="1"/>
-          <p:nvPr/>
-        </p:nvSpPr>
-        <p:spPr>
-          <a:xfrm>
-            <a:off x="8266175" y="1737360"/>
-            <a:ext cx="3108960" cy="411480"/>
-          </a:xfrm>
-          <a:prstGeom prst="rect">
-            <a:avLst/>
-          </a:prstGeom>
-          <a:noFill/>
-        </p:spPr>
-        <p:txBody>
-          <a:bodyPr wrap="none">
-            <a:spAutoFit/>
-          </a:bodyPr>
-          <a:lstStyle/>
-          <a:p>
-            <a:pPr>
-              <a:defRPr sz="1800" b="1">
-                <a:solidFill>
-                  <a:srgbClr val="C42B1C"/>
-                </a:solidFill>
-                <a:latin typeface="Aptos Display"/>
-              </a:defRPr>
-            </a:pPr>
-            <a:r>
-              <a:t>Safe stop</a:t>
-            </a:r>
-          </a:p>
-        </p:txBody>
-      </p:sp>
-      <p:sp>
-        <p:nvSpPr>
-          <p:cNvPr id="14" name="TextBox 13"/>
-          <p:cNvSpPr txBox="1"/>
-          <p:nvPr/>
-        </p:nvSpPr>
-        <p:spPr>
-          <a:xfrm>
-            <a:off x="8266175" y="2212848"/>
-            <a:ext cx="3108960" cy="3291840"/>
-          </a:xfrm>
-          <a:prstGeom prst="rect">
-            <a:avLst/>
-          </a:prstGeom>
-          <a:noFill/>
-        </p:spPr>
-        <p:txBody>
-          <a:bodyPr wrap="none">
-            <a:spAutoFit/>
-          </a:bodyPr>
-          <a:lstStyle/>
-          <a:p>
-            <a:pPr>
-              <a:spcAft>
-                <a:spcPts val="400"/>
-              </a:spcAft>
-              <a:defRPr sz="1500">
-                <a:solidFill>
-                  <a:srgbClr val="122038"/>
-                </a:solidFill>
-                <a:latin typeface="Aptos"/>
-              </a:defRPr>
-            </a:pPr>
-            <a:r>
-              <a:t>Missing evidence or risky action routes to human review.</a:t>
-            </a:r>
-            <a:br/>
-            <a:r>
-              <a:t>Deployment failure preserves the previous live version.</a:t>
-            </a:r>
-            <a:br/>
-            <a:r>
-              <a:t>Production is not touched.</a:t>
-            </a:r>
-          </a:p>
-        </p:txBody>
-      </p:sp>
-    </p:spTree>
-  </p:cSld>
-  <p:clrMapOvr>
-    <a:masterClrMapping/>
-  </p:clrMapOvr>
-</p:sld>
-</file>
-
-<file path=ppt/slides/slide9.xml><?xml version="1.0" encoding="utf-8"?>
-<p:sld xmlns:a="http://schemas.openxmlformats.org/drawingml/2006/main" xmlns:p="http://schemas.openxmlformats.org/presentationml/2006/main" xmlns:r="http://schemas.openxmlformats.org/officeDocument/2006/relationships">
-  <p:cSld>
-    <p:bg>
-      <p:bgPr>
-        <a:solidFill>
-          <a:srgbClr val="FFFFFF"/>
-        </a:solidFill>
-        <a:effectLst/>
-      </p:bgPr>
-    </p:bg>
-    <p:spTree>
-      <p:nvGrpSpPr>
-        <p:cNvPr id="1" name=""/>
-        <p:cNvGrpSpPr/>
-        <p:nvPr/>
-      </p:nvGrpSpPr>
-      <p:grpSpPr/>
-      <p:sp>
-        <p:nvSpPr>
-          <p:cNvPr id="2" name="TextBox 1"/>
-          <p:cNvSpPr txBox="1"/>
-          <p:nvPr/>
-        </p:nvSpPr>
-        <p:spPr>
-          <a:xfrm>
-            <a:off x="594360" y="320040"/>
-            <a:ext cx="10972800" cy="640080"/>
-          </a:xfrm>
-          <a:prstGeom prst="rect">
-            <a:avLst/>
-          </a:prstGeom>
-          <a:noFill/>
-        </p:spPr>
-        <p:txBody>
-          <a:bodyPr wrap="none">
-            <a:spAutoFit/>
-          </a:bodyPr>
-          <a:lstStyle/>
-          <a:p>
-            <a:pPr>
-              <a:defRPr sz="3000" b="1">
-                <a:solidFill>
-                  <a:srgbClr val="122038"/>
-                </a:solidFill>
-                <a:latin typeface="Aptos Display"/>
-              </a:defRPr>
-            </a:pPr>
-            <a:r>
-              <a:t>End-to-end evidence chain</a:t>
-            </a:r>
-          </a:p>
-        </p:txBody>
-      </p:sp>
-      <p:sp>
-        <p:nvSpPr>
-          <p:cNvPr id="3" name="Rectangle 2"/>
-          <p:cNvSpPr/>
-          <p:nvPr/>
-        </p:nvSpPr>
-        <p:spPr>
-          <a:xfrm>
-            <a:off x="0" y="6656832"/>
-            <a:ext cx="12191695" cy="201168"/>
-          </a:xfrm>
-          <a:prstGeom prst="rect">
-            <a:avLst/>
-          </a:prstGeom>
-          <a:solidFill>
-            <a:srgbClr val="0078D4"/>
-          </a:solidFill>
-          <a:ln>
-            <a:noFill/>
-          </a:ln>
-        </p:spPr>
-        <p:style>
-          <a:lnRef idx="1">
-            <a:schemeClr val="accent1"/>
-          </a:lnRef>
-          <a:fillRef idx="3">
-            <a:schemeClr val="accent1"/>
-          </a:fillRef>
-          <a:effectRef idx="2">
-            <a:schemeClr val="accent1"/>
-          </a:effectRef>
-          <a:fontRef idx="minor">
-            <a:schemeClr val="lt1"/>
-          </a:fontRef>
-        </p:style>
-        <p:txBody>
-          <a:bodyPr rtlCol="0" anchor="ctr"/>
-          <a:lstStyle/>
-          <a:p>
-            <a:pPr algn="ctr"/>
-          </a:p>
-        </p:txBody>
-      </p:sp>
-      <p:sp>
-        <p:nvSpPr>
-          <p:cNvPr id="4" name="TextBox 3"/>
-          <p:cNvSpPr txBox="1"/>
-          <p:nvPr/>
-        </p:nvSpPr>
-        <p:spPr>
-          <a:xfrm>
-            <a:off x="11521440" y="6419088"/>
-            <a:ext cx="365760" cy="228600"/>
-          </a:xfrm>
-          <a:prstGeom prst="rect">
-            <a:avLst/>
-          </a:prstGeom>
-          <a:noFill/>
-        </p:spPr>
-        <p:txBody>
-          <a:bodyPr wrap="none">
-            <a:spAutoFit/>
-          </a:bodyPr>
-          <a:lstStyle/>
-          <a:p>
-            <a:pPr algn="r">
-              <a:defRPr sz="1000">
-                <a:solidFill>
-                  <a:srgbClr val="5A6777"/>
-                </a:solidFill>
-              </a:defRPr>
-            </a:pPr>
-            <a:r>
-              <a:t>9</a:t>
-            </a:r>
-          </a:p>
-        </p:txBody>
-      </p:sp>
-      <p:sp>
-        <p:nvSpPr>
-          <p:cNvPr id="5" name="Rounded Rectangle 4"/>
-          <p:cNvSpPr/>
-          <p:nvPr/>
-        </p:nvSpPr>
-        <p:spPr>
-          <a:xfrm>
-            <a:off x="594360" y="2011680"/>
-            <a:ext cx="1259586" cy="960120"/>
-          </a:xfrm>
-          <a:prstGeom prst="roundRect">
-            <a:avLst/>
-          </a:prstGeom>
-          <a:solidFill>
-            <a:srgbClr val="0078D4"/>
-          </a:solidFill>
-          <a:ln>
-            <a:noFill/>
-          </a:ln>
-        </p:spPr>
-        <p:style>
-          <a:lnRef idx="1">
-            <a:schemeClr val="accent1"/>
-          </a:lnRef>
-          <a:fillRef idx="3">
-            <a:schemeClr val="accent1"/>
-          </a:fillRef>
-          <a:effectRef idx="2">
-            <a:schemeClr val="accent1"/>
-          </a:effectRef>
-          <a:fontRef idx="minor">
-            <a:schemeClr val="lt1"/>
-          </a:fontRef>
-        </p:style>
-        <p:txBody>
-          <a:bodyPr rtlCol="0" anchor="ctr"/>
-          <a:lstStyle/>
-          <a:p>
-            <a:pPr algn="ctr">
-              <a:defRPr sz="1400" b="1">
-                <a:solidFill>
-                  <a:srgbClr val="FFFFFF"/>
-                </a:solidFill>
-                <a:latin typeface="Aptos"/>
-              </a:defRPr>
-            </a:pPr>
-            <a:r>
-              <a:t>Requirement</a:t>
-            </a:r>
-          </a:p>
-        </p:txBody>
-      </p:sp>
-      <p:sp>
-        <p:nvSpPr>
-          <p:cNvPr id="6" name="TextBox 5"/>
-          <p:cNvSpPr txBox="1"/>
-          <p:nvPr/>
-        </p:nvSpPr>
-        <p:spPr>
-          <a:xfrm>
-            <a:off x="1835657" y="2304288"/>
-            <a:ext cx="173736" cy="320040"/>
-          </a:xfrm>
-          <a:prstGeom prst="rect">
-            <a:avLst/>
-          </a:prstGeom>
-          <a:noFill/>
-        </p:spPr>
-        <p:txBody>
-          <a:bodyPr wrap="none">
-            <a:spAutoFit/>
-          </a:bodyPr>
-          <a:lstStyle/>
-          <a:p>
-            <a:pPr algn="ctr">
-              <a:defRPr b="1">
-                <a:solidFill>
-                  <a:srgbClr val="5A6777"/>
-                </a:solidFill>
-              </a:defRPr>
-            </a:pPr>
-            <a:r>
-              <a:t>&gt;</a:t>
-            </a:r>
-          </a:p>
-        </p:txBody>
-      </p:sp>
-      <p:sp>
-        <p:nvSpPr>
-          <p:cNvPr id="7" name="Rounded Rectangle 6"/>
-          <p:cNvSpPr/>
-          <p:nvPr/>
-        </p:nvSpPr>
-        <p:spPr>
-          <a:xfrm>
-            <a:off x="1981962" y="2011680"/>
-            <a:ext cx="1259586" cy="960120"/>
-          </a:xfrm>
-          <a:prstGeom prst="roundRect">
-            <a:avLst/>
-          </a:prstGeom>
-          <a:solidFill>
-            <a:srgbClr val="009999"/>
-          </a:solidFill>
-          <a:ln>
-            <a:noFill/>
-          </a:ln>
-        </p:spPr>
-        <p:style>
-          <a:lnRef idx="1">
-            <a:schemeClr val="accent1"/>
-          </a:lnRef>
-          <a:fillRef idx="3">
-            <a:schemeClr val="accent1"/>
-          </a:fillRef>
-          <a:effectRef idx="2">
-            <a:schemeClr val="accent1"/>
-          </a:effectRef>
-          <a:fontRef idx="minor">
-            <a:schemeClr val="lt1"/>
-          </a:fontRef>
-        </p:style>
-        <p:txBody>
-          <a:bodyPr rtlCol="0" anchor="ctr"/>
-          <a:lstStyle/>
-          <a:p>
-            <a:pPr algn="ctr">
-              <a:defRPr sz="1400" b="1">
-                <a:solidFill>
-                  <a:srgbClr val="FFFFFF"/>
-                </a:solidFill>
-                <a:latin typeface="Aptos"/>
-              </a:defRPr>
-            </a:pPr>
-            <a:r>
-              <a:t>AB item</a:t>
-            </a:r>
-          </a:p>
-        </p:txBody>
-      </p:sp>
-      <p:sp>
-        <p:nvSpPr>
-          <p:cNvPr id="8" name="TextBox 7"/>
-          <p:cNvSpPr txBox="1"/>
-          <p:nvPr/>
-        </p:nvSpPr>
-        <p:spPr>
-          <a:xfrm>
-            <a:off x="3223260" y="2304288"/>
-            <a:ext cx="173736" cy="320040"/>
-          </a:xfrm>
-          <a:prstGeom prst="rect">
-            <a:avLst/>
-          </a:prstGeom>
-          <a:noFill/>
-        </p:spPr>
-        <p:txBody>
-          <a:bodyPr wrap="none">
-            <a:spAutoFit/>
-          </a:bodyPr>
-          <a:lstStyle/>
-          <a:p>
-            <a:pPr algn="ctr">
-              <a:defRPr b="1">
-                <a:solidFill>
-                  <a:srgbClr val="5A6777"/>
-                </a:solidFill>
-              </a:defRPr>
-            </a:pPr>
-            <a:r>
-              <a:t>&gt;</a:t>
-            </a:r>
-          </a:p>
-        </p:txBody>
-      </p:sp>
-      <p:sp>
-        <p:nvSpPr>
-          <p:cNvPr id="9" name="Rounded Rectangle 8"/>
-          <p:cNvSpPr/>
-          <p:nvPr/>
-        </p:nvSpPr>
-        <p:spPr>
-          <a:xfrm>
-            <a:off x="3369564" y="2011680"/>
-            <a:ext cx="1259586" cy="960120"/>
-          </a:xfrm>
-          <a:prstGeom prst="roundRect">
-            <a:avLst/>
-          </a:prstGeom>
-          <a:solidFill>
-            <a:srgbClr val="107C41"/>
-          </a:solidFill>
-          <a:ln>
-            <a:noFill/>
-          </a:ln>
-        </p:spPr>
-        <p:style>
-          <a:lnRef idx="1">
-            <a:schemeClr val="accent1"/>
-          </a:lnRef>
-          <a:fillRef idx="3">
-            <a:schemeClr val="accent1"/>
-          </a:fillRef>
-          <a:effectRef idx="2">
-            <a:schemeClr val="accent1"/>
-          </a:effectRef>
-          <a:fontRef idx="minor">
-            <a:schemeClr val="lt1"/>
-          </a:fontRef>
-        </p:style>
-        <p:txBody>
-          <a:bodyPr rtlCol="0" anchor="ctr"/>
-          <a:lstStyle/>
-          <a:p>
-            <a:pPr algn="ctr">
-              <a:defRPr sz="1400" b="1">
-                <a:solidFill>
-                  <a:srgbClr val="FFFFFF"/>
-                </a:solidFill>
-                <a:latin typeface="Aptos"/>
-              </a:defRPr>
-            </a:pPr>
-            <a:r>
-              <a:t>Issue</a:t>
-            </a:r>
-          </a:p>
-        </p:txBody>
-      </p:sp>
-      <p:sp>
-        <p:nvSpPr>
-          <p:cNvPr id="10" name="TextBox 9"/>
-          <p:cNvSpPr txBox="1"/>
-          <p:nvPr/>
-        </p:nvSpPr>
-        <p:spPr>
-          <a:xfrm>
-            <a:off x="4610862" y="2304288"/>
-            <a:ext cx="173736" cy="320040"/>
-          </a:xfrm>
-          <a:prstGeom prst="rect">
-            <a:avLst/>
-          </a:prstGeom>
-          <a:noFill/>
-        </p:spPr>
-        <p:txBody>
-          <a:bodyPr wrap="none">
-            <a:spAutoFit/>
-          </a:bodyPr>
-          <a:lstStyle/>
-          <a:p>
-            <a:pPr algn="ctr">
-              <a:defRPr b="1">
-                <a:solidFill>
-                  <a:srgbClr val="5A6777"/>
-                </a:solidFill>
-              </a:defRPr>
-            </a:pPr>
-            <a:r>
-              <a:t>&gt;</a:t>
-            </a:r>
-          </a:p>
-        </p:txBody>
-      </p:sp>
-      <p:sp>
-        <p:nvSpPr>
-          <p:cNvPr id="11" name="Rounded Rectangle 10"/>
-          <p:cNvSpPr/>
-          <p:nvPr/>
-        </p:nvSpPr>
-        <p:spPr>
-          <a:xfrm>
-            <a:off x="4757166" y="2011680"/>
-            <a:ext cx="1259586" cy="960120"/>
-          </a:xfrm>
-          <a:prstGeom prst="roundRect">
-            <a:avLst/>
-          </a:prstGeom>
-          <a:solidFill>
-            <a:srgbClr val="CA5010"/>
-          </a:solidFill>
-          <a:ln>
-            <a:noFill/>
-          </a:ln>
-        </p:spPr>
-        <p:style>
-          <a:lnRef idx="1">
-            <a:schemeClr val="accent1"/>
-          </a:lnRef>
-          <a:fillRef idx="3">
-            <a:schemeClr val="accent1"/>
-          </a:fillRef>
-          <a:effectRef idx="2">
-            <a:schemeClr val="accent1"/>
-          </a:effectRef>
-          <a:fontRef idx="minor">
-            <a:schemeClr val="lt1"/>
-          </a:fontRef>
-        </p:style>
-        <p:txBody>
-          <a:bodyPr rtlCol="0" anchor="ctr"/>
-          <a:lstStyle/>
-          <a:p>
-            <a:pPr algn="ctr">
-              <a:defRPr sz="1400" b="1">
-                <a:solidFill>
-                  <a:srgbClr val="FFFFFF"/>
-                </a:solidFill>
-                <a:latin typeface="Aptos"/>
-              </a:defRPr>
-            </a:pPr>
-            <a:r>
-              <a:t>PR</a:t>
-            </a:r>
-          </a:p>
-        </p:txBody>
-      </p:sp>
-      <p:sp>
-        <p:nvSpPr>
-          <p:cNvPr id="12" name="TextBox 11"/>
-          <p:cNvSpPr txBox="1"/>
-          <p:nvPr/>
-        </p:nvSpPr>
-        <p:spPr>
-          <a:xfrm>
-            <a:off x="5998464" y="2304288"/>
-            <a:ext cx="173736" cy="320040"/>
-          </a:xfrm>
-          <a:prstGeom prst="rect">
-            <a:avLst/>
-          </a:prstGeom>
-          <a:noFill/>
-        </p:spPr>
-        <p:txBody>
-          <a:bodyPr wrap="none">
-            <a:spAutoFit/>
-          </a:bodyPr>
-          <a:lstStyle/>
-          <a:p>
-            <a:pPr algn="ctr">
-              <a:defRPr b="1">
-                <a:solidFill>
-                  <a:srgbClr val="5A6777"/>
-                </a:solidFill>
-              </a:defRPr>
-            </a:pPr>
-            <a:r>
-              <a:t>&gt;</a:t>
-            </a:r>
-          </a:p>
-        </p:txBody>
-      </p:sp>
-      <p:sp>
-        <p:nvSpPr>
-          <p:cNvPr id="13" name="Rounded Rectangle 12"/>
-          <p:cNvSpPr/>
-          <p:nvPr/>
-        </p:nvSpPr>
-        <p:spPr>
-          <a:xfrm>
-            <a:off x="6144768" y="2011680"/>
-            <a:ext cx="1259586" cy="960120"/>
-          </a:xfrm>
-          <a:prstGeom prst="roundRect">
-            <a:avLst/>
-          </a:prstGeom>
-          <a:solidFill>
-            <a:srgbClr val="0078D4"/>
-          </a:solidFill>
-          <a:ln>
-            <a:noFill/>
-          </a:ln>
-        </p:spPr>
-        <p:style>
-          <a:lnRef idx="1">
-            <a:schemeClr val="accent1"/>
-          </a:lnRef>
-          <a:fillRef idx="3">
-            <a:schemeClr val="accent1"/>
-          </a:fillRef>
-          <a:effectRef idx="2">
-            <a:schemeClr val="accent1"/>
-          </a:effectRef>
-          <a:fontRef idx="minor">
-            <a:schemeClr val="lt1"/>
-          </a:fontRef>
-        </p:style>
-        <p:txBody>
-          <a:bodyPr rtlCol="0" anchor="ctr"/>
-          <a:lstStyle/>
-          <a:p>
-            <a:pPr algn="ctr">
-              <a:defRPr sz="1400" b="1">
-                <a:solidFill>
-                  <a:srgbClr val="FFFFFF"/>
-                </a:solidFill>
-                <a:latin typeface="Aptos"/>
-              </a:defRPr>
-            </a:pPr>
-            <a:r>
-              <a:t>CI</a:t>
-            </a:r>
-          </a:p>
-        </p:txBody>
-      </p:sp>
-      <p:sp>
-        <p:nvSpPr>
-          <p:cNvPr id="14" name="TextBox 13"/>
-          <p:cNvSpPr txBox="1"/>
-          <p:nvPr/>
-        </p:nvSpPr>
-        <p:spPr>
-          <a:xfrm>
-            <a:off x="7386066" y="2304288"/>
-            <a:ext cx="173736" cy="320040"/>
-          </a:xfrm>
-          <a:prstGeom prst="rect">
-            <a:avLst/>
-          </a:prstGeom>
-          <a:noFill/>
-        </p:spPr>
-        <p:txBody>
-          <a:bodyPr wrap="none">
-            <a:spAutoFit/>
-          </a:bodyPr>
-          <a:lstStyle/>
-          <a:p>
-            <a:pPr algn="ctr">
-              <a:defRPr b="1">
-                <a:solidFill>
-                  <a:srgbClr val="5A6777"/>
-                </a:solidFill>
-              </a:defRPr>
-            </a:pPr>
-            <a:r>
-              <a:t>&gt;</a:t>
-            </a:r>
-          </a:p>
-        </p:txBody>
-      </p:sp>
-      <p:sp>
-        <p:nvSpPr>
-          <p:cNvPr id="15" name="Rounded Rectangle 14"/>
-          <p:cNvSpPr/>
-          <p:nvPr/>
-        </p:nvSpPr>
-        <p:spPr>
-          <a:xfrm>
-            <a:off x="7532370" y="2011680"/>
-            <a:ext cx="1259586" cy="960120"/>
-          </a:xfrm>
-          <a:prstGeom prst="roundRect">
-            <a:avLst/>
-          </a:prstGeom>
-          <a:solidFill>
-            <a:srgbClr val="009999"/>
-          </a:solidFill>
-          <a:ln>
-            <a:noFill/>
-          </a:ln>
-        </p:spPr>
-        <p:style>
-          <a:lnRef idx="1">
-            <a:schemeClr val="accent1"/>
-          </a:lnRef>
-          <a:fillRef idx="3">
-            <a:schemeClr val="accent1"/>
-          </a:fillRef>
-          <a:effectRef idx="2">
-            <a:schemeClr val="accent1"/>
-          </a:effectRef>
-          <a:fontRef idx="minor">
-            <a:schemeClr val="lt1"/>
-          </a:fontRef>
-        </p:style>
-        <p:txBody>
-          <a:bodyPr rtlCol="0" anchor="ctr"/>
-          <a:lstStyle/>
-          <a:p>
-            <a:pPr algn="ctr">
-              <a:defRPr sz="1400" b="1">
-                <a:solidFill>
-                  <a:srgbClr val="FFFFFF"/>
-                </a:solidFill>
-                <a:latin typeface="Aptos"/>
-              </a:defRPr>
-            </a:pPr>
-            <a:r>
-              <a:t>Review</a:t>
-            </a:r>
-          </a:p>
-        </p:txBody>
-      </p:sp>
-      <p:sp>
-        <p:nvSpPr>
-          <p:cNvPr id="16" name="TextBox 15"/>
-          <p:cNvSpPr txBox="1"/>
-          <p:nvPr/>
-        </p:nvSpPr>
-        <p:spPr>
-          <a:xfrm>
-            <a:off x="8773668" y="2304288"/>
-            <a:ext cx="173736" cy="320040"/>
-          </a:xfrm>
-          <a:prstGeom prst="rect">
-            <a:avLst/>
-          </a:prstGeom>
-          <a:noFill/>
-        </p:spPr>
-        <p:txBody>
-          <a:bodyPr wrap="none">
-            <a:spAutoFit/>
-          </a:bodyPr>
-          <a:lstStyle/>
-          <a:p>
-            <a:pPr algn="ctr">
-              <a:defRPr b="1">
-                <a:solidFill>
-                  <a:srgbClr val="5A6777"/>
-                </a:solidFill>
-              </a:defRPr>
-            </a:pPr>
-            <a:r>
-              <a:t>&gt;</a:t>
-            </a:r>
-          </a:p>
-        </p:txBody>
-      </p:sp>
-      <p:sp>
-        <p:nvSpPr>
-          <p:cNvPr id="17" name="Rounded Rectangle 16"/>
-          <p:cNvSpPr/>
-          <p:nvPr/>
-        </p:nvSpPr>
-        <p:spPr>
-          <a:xfrm>
-            <a:off x="8919972" y="2011680"/>
-            <a:ext cx="1259586" cy="960120"/>
-          </a:xfrm>
-          <a:prstGeom prst="roundRect">
-            <a:avLst/>
-          </a:prstGeom>
-          <a:solidFill>
-            <a:srgbClr val="107C41"/>
-          </a:solidFill>
-          <a:ln>
-            <a:noFill/>
-          </a:ln>
-        </p:spPr>
-        <p:style>
-          <a:lnRef idx="1">
-            <a:schemeClr val="accent1"/>
-          </a:lnRef>
-          <a:fillRef idx="3">
-            <a:schemeClr val="accent1"/>
-          </a:fillRef>
-          <a:effectRef idx="2">
-            <a:schemeClr val="accent1"/>
-          </a:effectRef>
-          <a:fontRef idx="minor">
-            <a:schemeClr val="lt1"/>
-          </a:fontRef>
-        </p:style>
-        <p:txBody>
-          <a:bodyPr rtlCol="0" anchor="ctr"/>
-          <a:lstStyle/>
-          <a:p>
-            <a:pPr algn="ctr">
-              <a:defRPr sz="1400" b="1">
-                <a:solidFill>
-                  <a:srgbClr val="FFFFFF"/>
-                </a:solidFill>
-                <a:latin typeface="Aptos"/>
-              </a:defRPr>
-            </a:pPr>
-            <a:r>
-              <a:t>QA</a:t>
-            </a:r>
-          </a:p>
-        </p:txBody>
-      </p:sp>
-      <p:sp>
-        <p:nvSpPr>
-          <p:cNvPr id="18" name="TextBox 17"/>
-          <p:cNvSpPr txBox="1"/>
-          <p:nvPr/>
-        </p:nvSpPr>
-        <p:spPr>
-          <a:xfrm>
-            <a:off x="10161270" y="2304288"/>
-            <a:ext cx="173736" cy="320040"/>
-          </a:xfrm>
-          <a:prstGeom prst="rect">
-            <a:avLst/>
-          </a:prstGeom>
-          <a:noFill/>
-        </p:spPr>
-        <p:txBody>
-          <a:bodyPr wrap="none">
-            <a:spAutoFit/>
-          </a:bodyPr>
-          <a:lstStyle/>
-          <a:p>
-            <a:pPr algn="ctr">
-              <a:defRPr b="1">
-                <a:solidFill>
-                  <a:srgbClr val="5A6777"/>
-                </a:solidFill>
-              </a:defRPr>
-            </a:pPr>
-            <a:r>
-              <a:t>&gt;</a:t>
-            </a:r>
-          </a:p>
-        </p:txBody>
-      </p:sp>
-      <p:sp>
-        <p:nvSpPr>
-          <p:cNvPr id="19" name="Rounded Rectangle 18"/>
-          <p:cNvSpPr/>
-          <p:nvPr/>
-        </p:nvSpPr>
-        <p:spPr>
-          <a:xfrm>
-            <a:off x="10307574" y="2011680"/>
-            <a:ext cx="1259586" cy="960120"/>
-          </a:xfrm>
-          <a:prstGeom prst="roundRect">
-            <a:avLst/>
-          </a:prstGeom>
-          <a:solidFill>
-            <a:srgbClr val="122038"/>
-          </a:solidFill>
-          <a:ln>
-            <a:noFill/>
-          </a:ln>
-        </p:spPr>
-        <p:style>
-          <a:lnRef idx="1">
-            <a:schemeClr val="accent1"/>
-          </a:lnRef>
-          <a:fillRef idx="3">
-            <a:schemeClr val="accent1"/>
-          </a:fillRef>
-          <a:effectRef idx="2">
-            <a:schemeClr val="accent1"/>
-          </a:effectRef>
-          <a:fontRef idx="minor">
-            <a:schemeClr val="lt1"/>
-          </a:fontRef>
-        </p:style>
-        <p:txBody>
-          <a:bodyPr rtlCol="0" anchor="ctr"/>
-          <a:lstStyle/>
-          <a:p>
-            <a:pPr algn="ctr">
-              <a:defRPr sz="1400" b="1">
-                <a:solidFill>
-                  <a:srgbClr val="FFFFFF"/>
-                </a:solidFill>
-                <a:latin typeface="Aptos"/>
-              </a:defRPr>
-            </a:pPr>
-            <a:r>
-              <a:t>Deploy</a:t>
-            </a:r>
-          </a:p>
-        </p:txBody>
-      </p:sp>
-      <p:sp>
-        <p:nvSpPr>
-          <p:cNvPr id="20" name="Rounded Rectangle 19"/>
-          <p:cNvSpPr/>
-          <p:nvPr/>
-        </p:nvSpPr>
-        <p:spPr>
-          <a:xfrm>
-            <a:off x="914400" y="3977639"/>
-            <a:ext cx="10332720" cy="1280160"/>
-          </a:xfrm>
-          <a:prstGeom prst="roundRect">
-            <a:avLst/>
-          </a:prstGeom>
-          <a:solidFill>
-            <a:srgbClr val="F3F7FB"/>
-          </a:solidFill>
-          <a:ln w="25400">
-            <a:solidFill>
-              <a:srgbClr val="0078D4"/>
-            </a:solidFill>
-          </a:ln>
-        </p:spPr>
-        <p:style>
-          <a:lnRef idx="1">
-            <a:schemeClr val="accent1"/>
-          </a:lnRef>
-          <a:fillRef idx="3">
-            <a:schemeClr val="accent1"/>
-          </a:fillRef>
-          <a:effectRef idx="2">
-            <a:schemeClr val="accent1"/>
-          </a:effectRef>
-          <a:fontRef idx="minor">
-            <a:schemeClr val="lt1"/>
-          </a:fontRef>
-        </p:style>
-        <p:txBody>
-          <a:bodyPr rtlCol="0" anchor="ctr"/>
-          <a:lstStyle/>
-          <a:p>
-            <a:pPr algn="ctr"/>
-          </a:p>
-        </p:txBody>
-      </p:sp>
-      <p:sp>
-        <p:nvSpPr>
-          <p:cNvPr id="21" name="TextBox 20"/>
-          <p:cNvSpPr txBox="1"/>
-          <p:nvPr/>
-        </p:nvSpPr>
-        <p:spPr>
-          <a:xfrm>
-            <a:off x="1143000" y="4160520"/>
-            <a:ext cx="9875520" cy="411480"/>
-          </a:xfrm>
-          <a:prstGeom prst="rect">
-            <a:avLst/>
-          </a:prstGeom>
-          <a:noFill/>
-        </p:spPr>
-        <p:txBody>
-          <a:bodyPr wrap="none">
-            <a:spAutoFit/>
-          </a:bodyPr>
-          <a:lstStyle/>
-          <a:p>
-            <a:pPr>
-              <a:defRPr sz="1800" b="1">
-                <a:solidFill>
-                  <a:srgbClr val="0078D4"/>
-                </a:solidFill>
-                <a:latin typeface="Aptos Display"/>
-              </a:defRPr>
-            </a:pPr>
-            <a:r>
-              <a:t>Key takeaway</a:t>
-            </a:r>
-          </a:p>
-        </p:txBody>
-      </p:sp>
-      <p:sp>
-        <p:nvSpPr>
-          <p:cNvPr id="22" name="TextBox 21"/>
-          <p:cNvSpPr txBox="1"/>
-          <p:nvPr/>
-        </p:nvSpPr>
-        <p:spPr>
-          <a:xfrm>
-            <a:off x="1143000" y="4636007"/>
-            <a:ext cx="9875520" cy="457199"/>
-          </a:xfrm>
-          <a:prstGeom prst="rect">
-            <a:avLst/>
-          </a:prstGeom>
-          <a:noFill/>
-        </p:spPr>
-        <p:txBody>
-          <a:bodyPr wrap="none">
-            <a:spAutoFit/>
-          </a:bodyPr>
-          <a:lstStyle/>
-          <a:p>
-            <a:pPr>
-              <a:spcAft>
-                <a:spcPts val="400"/>
-              </a:spcAft>
-              <a:defRPr sz="1500">
-                <a:solidFill>
-                  <a:srgbClr val="122038"/>
-                </a:solidFill>
-                <a:latin typeface="Aptos"/>
-              </a:defRPr>
-            </a:pPr>
-            <a:r>
-              <a:t>The system accelerates implementation while retaining evidence, traceability, least privilege, and explicit human control over release.</a:t>
+              <a:t>Read TEAM-DEMO-GUIDE.md for live links and readiness notes. Pending PRs are not deployed features.</a:t>
             </a:r>
           </a:p>
         </p:txBody>
